--- a/data/official/PPT.pptx
+++ b/data/official/PPT.pptx
@@ -219,7 +219,7 @@
           <a:p>
             <a:fld id="{42668431-CD35-4516-818D-B41B2C4843CF}" type="datetimeFigureOut">
               <a:rPr lang="en-IN" smtClean="0"/>
-              <a:t>23-01-2026</a:t>
+              <a:t>30-01-2026</a:t>
             </a:fld>
             <a:endParaRPr lang="en-IN"/>
           </a:p>
@@ -583,7 +583,7 @@
         <p:cNvPr id="1" name="">
           <a:extLst>
             <a:ext uri="{FF2B5EF4-FFF2-40B4-BE49-F238E27FC236}">
-              <a16:creationId xmlns="" xmlns:a16="http://schemas.microsoft.com/office/drawing/2014/main" id="{F5EA6B61-674B-0ABF-F5C3-A72BF2845D1A}"/>
+              <a16:creationId xmlns:a16="http://schemas.microsoft.com/office/drawing/2014/main" id="{F5EA6B61-674B-0ABF-F5C3-A72BF2845D1A}"/>
             </a:ext>
           </a:extLst>
         </p:cNvPr>
@@ -603,7 +603,7 @@
           <p:cNvPr id="2" name="Slide Image Placeholder 1">
             <a:extLst>
               <a:ext uri="{FF2B5EF4-FFF2-40B4-BE49-F238E27FC236}">
-                <a16:creationId xmlns="" xmlns:a16="http://schemas.microsoft.com/office/drawing/2014/main" id="{F22FBED0-DE41-A040-921A-D95B51852C43}"/>
+                <a16:creationId xmlns:a16="http://schemas.microsoft.com/office/drawing/2014/main" id="{F22FBED0-DE41-A040-921A-D95B51852C43}"/>
               </a:ext>
             </a:extLst>
           </p:cNvPr>
@@ -621,7 +621,7 @@
           <p:cNvPr id="3" name="Notes Placeholder 2">
             <a:extLst>
               <a:ext uri="{FF2B5EF4-FFF2-40B4-BE49-F238E27FC236}">
-                <a16:creationId xmlns="" xmlns:a16="http://schemas.microsoft.com/office/drawing/2014/main" id="{6BB3F754-664A-ECDE-8199-65800D976329}"/>
+                <a16:creationId xmlns:a16="http://schemas.microsoft.com/office/drawing/2014/main" id="{6BB3F754-664A-ECDE-8199-65800D976329}"/>
               </a:ext>
             </a:extLst>
           </p:cNvPr>
@@ -650,7 +650,7 @@
           <p:cNvPr id="4" name="Slide Number Placeholder 3">
             <a:extLst>
               <a:ext uri="{FF2B5EF4-FFF2-40B4-BE49-F238E27FC236}">
-                <a16:creationId xmlns="" xmlns:a16="http://schemas.microsoft.com/office/drawing/2014/main" id="{BCAF3E54-5ADF-52CC-11B5-B7F7837DEE42}"/>
+                <a16:creationId xmlns:a16="http://schemas.microsoft.com/office/drawing/2014/main" id="{BCAF3E54-5ADF-52CC-11B5-B7F7837DEE42}"/>
               </a:ext>
             </a:extLst>
           </p:cNvPr>
@@ -1572,7 +1572,7 @@
           <a:p>
             <a:fld id="{F4AA89A1-F17A-4D3D-AC08-D16056C16514}" type="datetimeFigureOut">
               <a:rPr lang="en-IN" smtClean="0"/>
-              <a:t>23-01-2026</a:t>
+              <a:t>30-01-2026</a:t>
             </a:fld>
             <a:endParaRPr lang="en-IN"/>
           </a:p>
@@ -1742,7 +1742,7 @@
           <a:p>
             <a:fld id="{F4AA89A1-F17A-4D3D-AC08-D16056C16514}" type="datetimeFigureOut">
               <a:rPr lang="en-IN" smtClean="0"/>
-              <a:t>23-01-2026</a:t>
+              <a:t>30-01-2026</a:t>
             </a:fld>
             <a:endParaRPr lang="en-IN"/>
           </a:p>
@@ -1922,7 +1922,7 @@
           <a:p>
             <a:fld id="{F4AA89A1-F17A-4D3D-AC08-D16056C16514}" type="datetimeFigureOut">
               <a:rPr lang="en-IN" smtClean="0"/>
-              <a:t>23-01-2026</a:t>
+              <a:t>30-01-2026</a:t>
             </a:fld>
             <a:endParaRPr lang="en-IN"/>
           </a:p>
@@ -2092,7 +2092,7 @@
           <a:p>
             <a:fld id="{F4AA89A1-F17A-4D3D-AC08-D16056C16514}" type="datetimeFigureOut">
               <a:rPr lang="en-IN" smtClean="0"/>
-              <a:t>23-01-2026</a:t>
+              <a:t>30-01-2026</a:t>
             </a:fld>
             <a:endParaRPr lang="en-IN"/>
           </a:p>
@@ -2338,7 +2338,7 @@
           <a:p>
             <a:fld id="{F4AA89A1-F17A-4D3D-AC08-D16056C16514}" type="datetimeFigureOut">
               <a:rPr lang="en-IN" smtClean="0"/>
-              <a:t>23-01-2026</a:t>
+              <a:t>30-01-2026</a:t>
             </a:fld>
             <a:endParaRPr lang="en-IN"/>
           </a:p>
@@ -2626,7 +2626,7 @@
           <a:p>
             <a:fld id="{F4AA89A1-F17A-4D3D-AC08-D16056C16514}" type="datetimeFigureOut">
               <a:rPr lang="en-IN" smtClean="0"/>
-              <a:t>23-01-2026</a:t>
+              <a:t>30-01-2026</a:t>
             </a:fld>
             <a:endParaRPr lang="en-IN"/>
           </a:p>
@@ -3048,7 +3048,7 @@
           <a:p>
             <a:fld id="{F4AA89A1-F17A-4D3D-AC08-D16056C16514}" type="datetimeFigureOut">
               <a:rPr lang="en-IN" smtClean="0"/>
-              <a:t>23-01-2026</a:t>
+              <a:t>30-01-2026</a:t>
             </a:fld>
             <a:endParaRPr lang="en-IN"/>
           </a:p>
@@ -3166,7 +3166,7 @@
           <a:p>
             <a:fld id="{F4AA89A1-F17A-4D3D-AC08-D16056C16514}" type="datetimeFigureOut">
               <a:rPr lang="en-IN" smtClean="0"/>
-              <a:t>23-01-2026</a:t>
+              <a:t>30-01-2026</a:t>
             </a:fld>
             <a:endParaRPr lang="en-IN"/>
           </a:p>
@@ -3261,7 +3261,7 @@
           <a:p>
             <a:fld id="{F4AA89A1-F17A-4D3D-AC08-D16056C16514}" type="datetimeFigureOut">
               <a:rPr lang="en-IN" smtClean="0"/>
-              <a:t>23-01-2026</a:t>
+              <a:t>30-01-2026</a:t>
             </a:fld>
             <a:endParaRPr lang="en-IN"/>
           </a:p>
@@ -3538,7 +3538,7 @@
           <a:p>
             <a:fld id="{F4AA89A1-F17A-4D3D-AC08-D16056C16514}" type="datetimeFigureOut">
               <a:rPr lang="en-IN" smtClean="0"/>
-              <a:t>23-01-2026</a:t>
+              <a:t>30-01-2026</a:t>
             </a:fld>
             <a:endParaRPr lang="en-IN"/>
           </a:p>
@@ -3791,7 +3791,7 @@
           <a:p>
             <a:fld id="{F4AA89A1-F17A-4D3D-AC08-D16056C16514}" type="datetimeFigureOut">
               <a:rPr lang="en-IN" smtClean="0"/>
-              <a:t>23-01-2026</a:t>
+              <a:t>30-01-2026</a:t>
             </a:fld>
             <a:endParaRPr lang="en-IN"/>
           </a:p>
@@ -4004,7 +4004,7 @@
           <a:p>
             <a:fld id="{F4AA89A1-F17A-4D3D-AC08-D16056C16514}" type="datetimeFigureOut">
               <a:rPr lang="en-IN" smtClean="0"/>
-              <a:t>23-01-2026</a:t>
+              <a:t>30-01-2026</a:t>
             </a:fld>
             <a:endParaRPr lang="en-IN"/>
           </a:p>
@@ -4431,35 +4431,6 @@
           <a:chExt cx="0" cy="0"/>
         </a:xfrm>
       </p:grpSpPr>
-      <p:pic>
-        <p:nvPicPr>
-          <p:cNvPr id="4" name="Content Placeholder 3"/>
-          <p:cNvPicPr>
-            <a:picLocks noGrp="1" noChangeAspect="1"/>
-          </p:cNvPicPr>
-          <p:nvPr>
-            <p:ph idx="1"/>
-          </p:nvPr>
-        </p:nvPicPr>
-        <p:blipFill>
-          <a:blip r:embed="rId3" cstate="print">
-            <a:extLst>
-              <a:ext uri="{28A0092B-C50C-407E-A947-70E740481C1C}">
-                <a14:useLocalDpi xmlns:a14="http://schemas.microsoft.com/office/drawing/2010/main" val="0"/>
-              </a:ext>
-            </a:extLst>
-          </a:blip>
-          <a:stretch>
-            <a:fillRect/>
-          </a:stretch>
-        </p:blipFill>
-        <p:spPr>
-          <a:xfrm>
-            <a:off x="1" y="0"/>
-            <a:ext cx="9180512" cy="6885384"/>
-          </a:xfrm>
-        </p:spPr>
-      </p:pic>
       <p:sp>
         <p:nvSpPr>
           <p:cNvPr id="5" name="Rectangle 1"/>
@@ -4585,7 +4556,7 @@
           <p:nvPr/>
         </p:nvPicPr>
         <p:blipFill>
-          <a:blip r:embed="rId4" cstate="print">
+          <a:blip r:embed="rId3" cstate="print">
             <a:extLst>
               <a:ext uri="{28A0092B-C50C-407E-A947-70E740481C1C}">
                 <a14:useLocalDpi xmlns:a14="http://schemas.microsoft.com/office/drawing/2010/main" val="0"/>
@@ -4611,7 +4582,7 @@
           <p:cNvPr id="6" name="TextBox 5">
             <a:extLst>
               <a:ext uri="{FF2B5EF4-FFF2-40B4-BE49-F238E27FC236}">
-                <a16:creationId xmlns="" xmlns:a16="http://schemas.microsoft.com/office/drawing/2014/main" id="{AE24D516-77C6-C96A-5F77-D099623448D8}"/>
+                <a16:creationId xmlns:a16="http://schemas.microsoft.com/office/drawing/2014/main" id="{AE24D516-77C6-C96A-5F77-D099623448D8}"/>
               </a:ext>
             </a:extLst>
           </p:cNvPr>
@@ -4663,6 +4634,411 @@
               <a:ea typeface="Calibri" panose="020F0502020204030204" pitchFamily="34" charset="0"/>
               <a:cs typeface="Times New Roman" panose="02020603050405020304" pitchFamily="18" charset="0"/>
             </a:endParaRPr>
+          </a:p>
+        </p:txBody>
+      </p:sp>
+      <p:sp>
+        <p:nvSpPr>
+          <p:cNvPr id="8" name="Rectangle 1">
+            <a:extLst>
+              <a:ext uri="{FF2B5EF4-FFF2-40B4-BE49-F238E27FC236}">
+                <a16:creationId xmlns:a16="http://schemas.microsoft.com/office/drawing/2014/main" id="{E957663B-6BC8-4F3D-A957-AC5BC6E725B5}"/>
+              </a:ext>
+            </a:extLst>
+          </p:cNvPr>
+          <p:cNvSpPr>
+            <a:spLocks noGrp="1" noChangeArrowheads="1"/>
+          </p:cNvSpPr>
+          <p:nvPr>
+            <p:ph idx="1"/>
+          </p:nvPr>
+        </p:nvSpPr>
+        <p:spPr bwMode="auto">
+          <a:xfrm>
+            <a:off x="457200" y="2016523"/>
+            <a:ext cx="8219256" cy="3693319"/>
+          </a:xfrm>
+          <a:prstGeom prst="rect">
+            <a:avLst/>
+          </a:prstGeom>
+          <a:noFill/>
+          <a:ln>
+            <a:noFill/>
+          </a:ln>
+          <a:effectLst/>
+          <a:extLst>
+            <a:ext uri="{909E8E84-426E-40DD-AFC4-6F175D3DCCD1}">
+              <a14:hiddenFill xmlns:a14="http://schemas.microsoft.com/office/drawing/2010/main">
+                <a:solidFill>
+                  <a:schemeClr val="accent1"/>
+                </a:solidFill>
+              </a14:hiddenFill>
+            </a:ext>
+            <a:ext uri="{91240B29-F687-4F45-9708-019B960494DF}">
+              <a14:hiddenLine xmlns:a14="http://schemas.microsoft.com/office/drawing/2010/main" w="9525">
+                <a:solidFill>
+                  <a:schemeClr val="tx1"/>
+                </a:solidFill>
+                <a:miter lim="800000"/>
+                <a:headEnd/>
+                <a:tailEnd/>
+              </a14:hiddenLine>
+            </a:ext>
+            <a:ext uri="{AF507438-7753-43E0-B8FC-AC1667EBCBE1}">
+              <a14:hiddenEffects xmlns:a14="http://schemas.microsoft.com/office/drawing/2010/main">
+                <a:effectLst>
+                  <a:outerShdw dist="35921" dir="2700000" algn="ctr" rotWithShape="0">
+                    <a:schemeClr val="bg2"/>
+                  </a:outerShdw>
+                </a:effectLst>
+              </a14:hiddenEffects>
+            </a:ext>
+          </a:extLst>
+        </p:spPr>
+        <p:txBody>
+          <a:bodyPr vert="horz" wrap="square" lIns="91440" tIns="45720" rIns="91440" bIns="45720" numCol="1" anchor="ctr" anchorCtr="0" compatLnSpc="1">
+            <a:prstTxWarp prst="textNoShape">
+              <a:avLst/>
+            </a:prstTxWarp>
+            <a:spAutoFit/>
+          </a:bodyPr>
+          <a:lstStyle/>
+          <a:p>
+            <a:pPr marL="0" marR="0" lvl="0" indent="0" algn="l" defTabSz="914400" rtl="0" eaLnBrk="0" fontAlgn="base" latinLnBrk="0" hangingPunct="0">
+              <a:lnSpc>
+                <a:spcPct val="100000"/>
+              </a:lnSpc>
+              <a:spcBef>
+                <a:spcPct val="0"/>
+              </a:spcBef>
+              <a:spcAft>
+                <a:spcPct val="0"/>
+              </a:spcAft>
+              <a:buClrTx/>
+              <a:buSzTx/>
+              <a:buNone/>
+              <a:tabLst/>
+            </a:pPr>
+            <a:r>
+              <a:rPr kumimoji="0" lang="en-US" altLang="en-US" sz="1800" b="1" i="0" u="none" strike="noStrike" cap="none" normalizeH="0" baseline="0" dirty="0">
+                <a:ln>
+                  <a:noFill/>
+                </a:ln>
+                <a:solidFill>
+                  <a:schemeClr val="tx1"/>
+                </a:solidFill>
+                <a:effectLst/>
+                <a:latin typeface="Verdana" panose="020B0604030504040204" pitchFamily="34" charset="0"/>
+                <a:ea typeface="Verdana" panose="020B0604030504040204" pitchFamily="34" charset="0"/>
+              </a:rPr>
+              <a:t>Operational Savings:</a:t>
+            </a:r>
+            <a:endParaRPr kumimoji="0" lang="en-US" altLang="en-US" sz="1800" b="0" i="0" u="none" strike="noStrike" cap="none" normalizeH="0" baseline="0" dirty="0">
+              <a:ln>
+                <a:noFill/>
+              </a:ln>
+              <a:solidFill>
+                <a:schemeClr val="tx1"/>
+              </a:solidFill>
+              <a:effectLst/>
+              <a:latin typeface="Verdana" panose="020B0604030504040204" pitchFamily="34" charset="0"/>
+              <a:ea typeface="Verdana" panose="020B0604030504040204" pitchFamily="34" charset="0"/>
+            </a:endParaRPr>
+          </a:p>
+          <a:p>
+            <a:pPr marL="0" marR="0" lvl="0" indent="0" algn="l" defTabSz="914400" rtl="0" eaLnBrk="0" fontAlgn="base" latinLnBrk="0" hangingPunct="0">
+              <a:lnSpc>
+                <a:spcPct val="100000"/>
+              </a:lnSpc>
+              <a:spcBef>
+                <a:spcPct val="0"/>
+              </a:spcBef>
+              <a:spcAft>
+                <a:spcPct val="0"/>
+              </a:spcAft>
+              <a:buClrTx/>
+              <a:buSzTx/>
+              <a:buNone/>
+              <a:tabLst/>
+            </a:pPr>
+            <a:r>
+              <a:rPr kumimoji="0" lang="en-US" altLang="en-US" sz="1800" i="0" u="none" strike="noStrike" cap="none" normalizeH="0" baseline="0" dirty="0">
+                <a:ln>
+                  <a:noFill/>
+                </a:ln>
+                <a:solidFill>
+                  <a:schemeClr val="tx1"/>
+                </a:solidFill>
+                <a:effectLst/>
+                <a:latin typeface="Verdana" panose="020B0604030504040204" pitchFamily="34" charset="0"/>
+                <a:ea typeface="Verdana" panose="020B0604030504040204" pitchFamily="34" charset="0"/>
+              </a:rPr>
+              <a:t>100% elimination of software licensing costs.</a:t>
+            </a:r>
+          </a:p>
+          <a:p>
+            <a:pPr marL="0" marR="0" lvl="0" indent="0" algn="l" defTabSz="914400" rtl="0" eaLnBrk="0" fontAlgn="base" latinLnBrk="0" hangingPunct="0">
+              <a:lnSpc>
+                <a:spcPct val="100000"/>
+              </a:lnSpc>
+              <a:spcBef>
+                <a:spcPct val="0"/>
+              </a:spcBef>
+              <a:spcAft>
+                <a:spcPct val="0"/>
+              </a:spcAft>
+              <a:buClrTx/>
+              <a:buSzTx/>
+              <a:buNone/>
+              <a:tabLst/>
+            </a:pPr>
+            <a:r>
+              <a:rPr kumimoji="0" lang="en-US" altLang="en-US" sz="1800" i="0" u="none" strike="noStrike" cap="none" normalizeH="0" baseline="0" dirty="0">
+                <a:ln>
+                  <a:noFill/>
+                </a:ln>
+                <a:solidFill>
+                  <a:schemeClr val="tx1"/>
+                </a:solidFill>
+                <a:effectLst/>
+                <a:latin typeface="Verdana" panose="020B0604030504040204" pitchFamily="34" charset="0"/>
+                <a:ea typeface="Verdana" panose="020B0604030504040204" pitchFamily="34" charset="0"/>
+              </a:rPr>
+              <a:t>Estimated 10-15% reduction in fuel consumption due to optimized paths.</a:t>
+            </a:r>
+          </a:p>
+          <a:p>
+            <a:pPr marL="0" marR="0" lvl="0" indent="0" algn="l" defTabSz="914400" rtl="0" eaLnBrk="0" fontAlgn="base" latinLnBrk="0" hangingPunct="0">
+              <a:lnSpc>
+                <a:spcPct val="100000"/>
+              </a:lnSpc>
+              <a:spcBef>
+                <a:spcPct val="0"/>
+              </a:spcBef>
+              <a:spcAft>
+                <a:spcPct val="0"/>
+              </a:spcAft>
+              <a:buClrTx/>
+              <a:buSzTx/>
+              <a:buNone/>
+              <a:tabLst/>
+            </a:pPr>
+            <a:endParaRPr kumimoji="0" lang="en-US" altLang="en-US" sz="1800" b="1" i="0" u="none" strike="noStrike" cap="none" normalizeH="0" baseline="0" dirty="0">
+              <a:ln>
+                <a:noFill/>
+              </a:ln>
+              <a:solidFill>
+                <a:schemeClr val="tx1"/>
+              </a:solidFill>
+              <a:effectLst/>
+              <a:latin typeface="Verdana" panose="020B0604030504040204" pitchFamily="34" charset="0"/>
+              <a:ea typeface="Verdana" panose="020B0604030504040204" pitchFamily="34" charset="0"/>
+            </a:endParaRPr>
+          </a:p>
+          <a:p>
+            <a:pPr marL="0" marR="0" lvl="0" indent="0" algn="l" defTabSz="914400" rtl="0" eaLnBrk="0" fontAlgn="base" latinLnBrk="0" hangingPunct="0">
+              <a:lnSpc>
+                <a:spcPct val="100000"/>
+              </a:lnSpc>
+              <a:spcBef>
+                <a:spcPct val="0"/>
+              </a:spcBef>
+              <a:spcAft>
+                <a:spcPct val="0"/>
+              </a:spcAft>
+              <a:buClrTx/>
+              <a:buSzTx/>
+              <a:buNone/>
+              <a:tabLst/>
+            </a:pPr>
+            <a:r>
+              <a:rPr kumimoji="0" lang="en-US" altLang="en-US" sz="1800" b="1" i="0" u="none" strike="noStrike" cap="none" normalizeH="0" baseline="0" dirty="0">
+                <a:ln>
+                  <a:noFill/>
+                </a:ln>
+                <a:solidFill>
+                  <a:schemeClr val="tx1"/>
+                </a:solidFill>
+                <a:effectLst/>
+                <a:latin typeface="Verdana" panose="020B0604030504040204" pitchFamily="34" charset="0"/>
+                <a:ea typeface="Verdana" panose="020B0604030504040204" pitchFamily="34" charset="0"/>
+              </a:rPr>
+              <a:t>Efficiency:</a:t>
+            </a:r>
+            <a:endParaRPr kumimoji="0" lang="en-US" altLang="en-US" sz="1800" b="0" i="0" u="none" strike="noStrike" cap="none" normalizeH="0" baseline="0" dirty="0">
+              <a:ln>
+                <a:noFill/>
+              </a:ln>
+              <a:solidFill>
+                <a:schemeClr val="tx1"/>
+              </a:solidFill>
+              <a:effectLst/>
+              <a:latin typeface="Verdana" panose="020B0604030504040204" pitchFamily="34" charset="0"/>
+              <a:ea typeface="Verdana" panose="020B0604030504040204" pitchFamily="34" charset="0"/>
+            </a:endParaRPr>
+          </a:p>
+          <a:p>
+            <a:pPr marL="0" marR="0" lvl="0" indent="0" algn="l" defTabSz="914400" rtl="0" eaLnBrk="0" fontAlgn="base" latinLnBrk="0" hangingPunct="0">
+              <a:lnSpc>
+                <a:spcPct val="100000"/>
+              </a:lnSpc>
+              <a:spcBef>
+                <a:spcPct val="0"/>
+              </a:spcBef>
+              <a:spcAft>
+                <a:spcPct val="0"/>
+              </a:spcAft>
+              <a:buClrTx/>
+              <a:buSzTx/>
+              <a:buNone/>
+              <a:tabLst/>
+            </a:pPr>
+            <a:r>
+              <a:rPr kumimoji="0" lang="en-US" altLang="en-US" sz="1800" b="0" i="0" u="none" strike="noStrike" cap="none" normalizeH="0" baseline="0" dirty="0">
+                <a:ln>
+                  <a:noFill/>
+                </a:ln>
+                <a:solidFill>
+                  <a:schemeClr val="tx1"/>
+                </a:solidFill>
+                <a:effectLst/>
+                <a:latin typeface="Verdana" panose="020B0604030504040204" pitchFamily="34" charset="0"/>
+                <a:ea typeface="Verdana" panose="020B0604030504040204" pitchFamily="34" charset="0"/>
+              </a:rPr>
+              <a:t>Reduction in manual planning time from weeks to minutes.</a:t>
+            </a:r>
+          </a:p>
+          <a:p>
+            <a:pPr marL="0" marR="0" lvl="0" indent="0" algn="l" defTabSz="914400" rtl="0" eaLnBrk="0" fontAlgn="base" latinLnBrk="0" hangingPunct="0">
+              <a:lnSpc>
+                <a:spcPct val="100000"/>
+              </a:lnSpc>
+              <a:spcBef>
+                <a:spcPct val="0"/>
+              </a:spcBef>
+              <a:spcAft>
+                <a:spcPct val="0"/>
+              </a:spcAft>
+              <a:buClrTx/>
+              <a:buSzTx/>
+              <a:buNone/>
+              <a:tabLst/>
+            </a:pPr>
+            <a:r>
+              <a:rPr kumimoji="0" lang="en-US" altLang="en-US" sz="1800" b="0" i="0" u="none" strike="noStrike" cap="none" normalizeH="0" baseline="0" dirty="0">
+                <a:ln>
+                  <a:noFill/>
+                </a:ln>
+                <a:solidFill>
+                  <a:schemeClr val="tx1"/>
+                </a:solidFill>
+                <a:effectLst/>
+                <a:latin typeface="Verdana" panose="020B0604030504040204" pitchFamily="34" charset="0"/>
+                <a:ea typeface="Verdana" panose="020B0604030504040204" pitchFamily="34" charset="0"/>
+              </a:rPr>
+              <a:t>Balanced passenger loads, preventing overcrowding on popular routes.</a:t>
+            </a:r>
+          </a:p>
+          <a:p>
+            <a:pPr marL="0" marR="0" lvl="0" indent="0" algn="l" defTabSz="914400" rtl="0" eaLnBrk="0" fontAlgn="base" latinLnBrk="0" hangingPunct="0">
+              <a:lnSpc>
+                <a:spcPct val="100000"/>
+              </a:lnSpc>
+              <a:spcBef>
+                <a:spcPct val="0"/>
+              </a:spcBef>
+              <a:spcAft>
+                <a:spcPct val="0"/>
+              </a:spcAft>
+              <a:buClrTx/>
+              <a:buSzTx/>
+              <a:buNone/>
+              <a:tabLst/>
+            </a:pPr>
+            <a:endParaRPr kumimoji="0" lang="en-US" altLang="en-US" sz="1800" b="1" i="0" u="none" strike="noStrike" cap="none" normalizeH="0" baseline="0" dirty="0">
+              <a:ln>
+                <a:noFill/>
+              </a:ln>
+              <a:solidFill>
+                <a:schemeClr val="tx1"/>
+              </a:solidFill>
+              <a:effectLst/>
+              <a:latin typeface="Verdana" panose="020B0604030504040204" pitchFamily="34" charset="0"/>
+              <a:ea typeface="Verdana" panose="020B0604030504040204" pitchFamily="34" charset="0"/>
+            </a:endParaRPr>
+          </a:p>
+          <a:p>
+            <a:pPr marL="0" marR="0" lvl="0" indent="0" algn="l" defTabSz="914400" rtl="0" eaLnBrk="0" fontAlgn="base" latinLnBrk="0" hangingPunct="0">
+              <a:lnSpc>
+                <a:spcPct val="100000"/>
+              </a:lnSpc>
+              <a:spcBef>
+                <a:spcPct val="0"/>
+              </a:spcBef>
+              <a:spcAft>
+                <a:spcPct val="0"/>
+              </a:spcAft>
+              <a:buClrTx/>
+              <a:buSzTx/>
+              <a:buNone/>
+              <a:tabLst/>
+            </a:pPr>
+            <a:r>
+              <a:rPr kumimoji="0" lang="en-US" altLang="en-US" sz="1800" b="1" i="0" u="none" strike="noStrike" cap="none" normalizeH="0" baseline="0" dirty="0">
+                <a:ln>
+                  <a:noFill/>
+                </a:ln>
+                <a:solidFill>
+                  <a:schemeClr val="tx1"/>
+                </a:solidFill>
+                <a:effectLst/>
+                <a:latin typeface="Verdana" panose="020B0604030504040204" pitchFamily="34" charset="0"/>
+                <a:ea typeface="Verdana" panose="020B0604030504040204" pitchFamily="34" charset="0"/>
+              </a:rPr>
+              <a:t>Sustainability:</a:t>
+            </a:r>
+            <a:endParaRPr kumimoji="0" lang="en-US" altLang="en-US" sz="1800" b="0" i="0" u="none" strike="noStrike" cap="none" normalizeH="0" baseline="0" dirty="0">
+              <a:ln>
+                <a:noFill/>
+              </a:ln>
+              <a:solidFill>
+                <a:schemeClr val="tx1"/>
+              </a:solidFill>
+              <a:effectLst/>
+              <a:latin typeface="Verdana" panose="020B0604030504040204" pitchFamily="34" charset="0"/>
+              <a:ea typeface="Verdana" panose="020B0604030504040204" pitchFamily="34" charset="0"/>
+            </a:endParaRPr>
+          </a:p>
+          <a:p>
+            <a:pPr marL="0" marR="0" lvl="0" indent="0" algn="l" defTabSz="914400" rtl="0" eaLnBrk="0" fontAlgn="base" latinLnBrk="0" hangingPunct="0">
+              <a:lnSpc>
+                <a:spcPct val="100000"/>
+              </a:lnSpc>
+              <a:spcBef>
+                <a:spcPct val="0"/>
+              </a:spcBef>
+              <a:spcAft>
+                <a:spcPct val="0"/>
+              </a:spcAft>
+              <a:buClrTx/>
+              <a:buSzTx/>
+              <a:buNone/>
+              <a:tabLst/>
+            </a:pPr>
+            <a:r>
+              <a:rPr kumimoji="0" lang="en-US" altLang="en-US" sz="1800" b="0" i="0" u="none" strike="noStrike" cap="none" normalizeH="0" baseline="0" dirty="0">
+                <a:ln>
+                  <a:noFill/>
+                </a:ln>
+                <a:solidFill>
+                  <a:schemeClr val="tx1"/>
+                </a:solidFill>
+                <a:effectLst/>
+                <a:latin typeface="Verdana" panose="020B0604030504040204" pitchFamily="34" charset="0"/>
+                <a:ea typeface="Verdana" panose="020B0604030504040204" pitchFamily="34" charset="0"/>
+              </a:rPr>
+              <a:t>Reduction in carbon footprint by minimizing deadhead (empty) kilometers.</a:t>
+            </a:r>
           </a:p>
         </p:txBody>
       </p:sp>
@@ -4687,7 +5063,7 @@
         <p:cNvPr id="1" name="">
           <a:extLst>
             <a:ext uri="{FF2B5EF4-FFF2-40B4-BE49-F238E27FC236}">
-              <a16:creationId xmlns="" xmlns:a16="http://schemas.microsoft.com/office/drawing/2014/main" id="{BDBD42DB-FF71-D8E6-630F-399C60C5361D}"/>
+              <a16:creationId xmlns:a16="http://schemas.microsoft.com/office/drawing/2014/main" id="{BDBD42DB-FF71-D8E6-630F-399C60C5361D}"/>
             </a:ext>
           </a:extLst>
         </p:cNvPr>
@@ -4702,47 +5078,12 @@
           <a:chExt cx="0" cy="0"/>
         </a:xfrm>
       </p:grpSpPr>
-      <p:pic>
-        <p:nvPicPr>
-          <p:cNvPr id="4" name="Content Placeholder 3">
-            <a:extLst>
-              <a:ext uri="{FF2B5EF4-FFF2-40B4-BE49-F238E27FC236}">
-                <a16:creationId xmlns="" xmlns:a16="http://schemas.microsoft.com/office/drawing/2014/main" id="{52FB631E-E469-C80D-C58A-99E545F3785B}"/>
-              </a:ext>
-            </a:extLst>
-          </p:cNvPr>
-          <p:cNvPicPr>
-            <a:picLocks noGrp="1" noChangeAspect="1"/>
-          </p:cNvPicPr>
-          <p:nvPr>
-            <p:ph idx="1"/>
-          </p:nvPr>
-        </p:nvPicPr>
-        <p:blipFill>
-          <a:blip r:embed="rId3" cstate="print">
-            <a:extLst>
-              <a:ext uri="{28A0092B-C50C-407E-A947-70E740481C1C}">
-                <a14:useLocalDpi xmlns:a14="http://schemas.microsoft.com/office/drawing/2010/main" val="0"/>
-              </a:ext>
-            </a:extLst>
-          </a:blip>
-          <a:stretch>
-            <a:fillRect/>
-          </a:stretch>
-        </p:blipFill>
-        <p:spPr>
-          <a:xfrm>
-            <a:off x="1" y="0"/>
-            <a:ext cx="9180512" cy="6885384"/>
-          </a:xfrm>
-        </p:spPr>
-      </p:pic>
       <p:sp>
         <p:nvSpPr>
           <p:cNvPr id="5" name="Rectangle 1">
             <a:extLst>
               <a:ext uri="{FF2B5EF4-FFF2-40B4-BE49-F238E27FC236}">
-                <a16:creationId xmlns="" xmlns:a16="http://schemas.microsoft.com/office/drawing/2014/main" id="{3B6D9598-AD90-B9CA-8610-998CE22F1CA3}"/>
+                <a16:creationId xmlns:a16="http://schemas.microsoft.com/office/drawing/2014/main" id="{3B6D9598-AD90-B9CA-8610-998CE22F1CA3}"/>
               </a:ext>
             </a:extLst>
           </p:cNvPr>
@@ -4829,7 +5170,7 @@
           <p:cNvPr id="7" name="Straight Connector 6">
             <a:extLst>
               <a:ext uri="{FF2B5EF4-FFF2-40B4-BE49-F238E27FC236}">
-                <a16:creationId xmlns="" xmlns:a16="http://schemas.microsoft.com/office/drawing/2014/main" id="{1362D34C-9176-DD2A-8AAF-507BD46BD710}"/>
+                <a16:creationId xmlns:a16="http://schemas.microsoft.com/office/drawing/2014/main" id="{1362D34C-9176-DD2A-8AAF-507BD46BD710}"/>
               </a:ext>
             </a:extLst>
           </p:cNvPr>
@@ -4870,7 +5211,7 @@
           <p:cNvPr id="9" name="Picture 8">
             <a:extLst>
               <a:ext uri="{FF2B5EF4-FFF2-40B4-BE49-F238E27FC236}">
-                <a16:creationId xmlns="" xmlns:a16="http://schemas.microsoft.com/office/drawing/2014/main" id="{4066F8A4-300F-9AE0-4A5E-2A2D19A8A541}"/>
+                <a16:creationId xmlns:a16="http://schemas.microsoft.com/office/drawing/2014/main" id="{4066F8A4-300F-9AE0-4A5E-2A2D19A8A541}"/>
               </a:ext>
             </a:extLst>
           </p:cNvPr>
@@ -4880,7 +5221,7 @@
           <p:nvPr/>
         </p:nvPicPr>
         <p:blipFill>
-          <a:blip r:embed="rId4" cstate="print">
+          <a:blip r:embed="rId3" cstate="print">
             <a:extLst>
               <a:ext uri="{28A0092B-C50C-407E-A947-70E740481C1C}">
                 <a14:useLocalDpi xmlns:a14="http://schemas.microsoft.com/office/drawing/2010/main" val="0"/>
@@ -4906,7 +5247,7 @@
           <p:cNvPr id="6" name="TextBox 5">
             <a:extLst>
               <a:ext uri="{FF2B5EF4-FFF2-40B4-BE49-F238E27FC236}">
-                <a16:creationId xmlns="" xmlns:a16="http://schemas.microsoft.com/office/drawing/2014/main" id="{C166FAC4-E627-209B-D9A4-20EC84D69C44}"/>
+                <a16:creationId xmlns:a16="http://schemas.microsoft.com/office/drawing/2014/main" id="{C166FAC4-E627-209B-D9A4-20EC84D69C44}"/>
               </a:ext>
             </a:extLst>
           </p:cNvPr>
@@ -4961,62 +5302,36 @@
           </a:p>
         </p:txBody>
       </p:sp>
-      <p:sp>
-        <p:nvSpPr>
-          <p:cNvPr id="3" name="TextBox 2">
+      <p:pic>
+        <p:nvPicPr>
+          <p:cNvPr id="11" name="Picture 10">
             <a:extLst>
               <a:ext uri="{FF2B5EF4-FFF2-40B4-BE49-F238E27FC236}">
-                <a16:creationId xmlns="" xmlns:a16="http://schemas.microsoft.com/office/drawing/2014/main" id="{3EFC42AB-18CA-0963-DBE1-ABF7FDD5C215}"/>
+                <a16:creationId xmlns:a16="http://schemas.microsoft.com/office/drawing/2014/main" id="{DD920D16-C2DE-DFF5-467D-310A7265C2BC}"/>
               </a:ext>
             </a:extLst>
           </p:cNvPr>
-          <p:cNvSpPr txBox="1"/>
+          <p:cNvPicPr>
+            <a:picLocks noChangeAspect="1"/>
+          </p:cNvPicPr>
           <p:nvPr/>
-        </p:nvSpPr>
+        </p:nvPicPr>
+        <p:blipFill>
+          <a:blip r:embed="rId4"/>
+          <a:stretch>
+            <a:fillRect/>
+          </a:stretch>
+        </p:blipFill>
         <p:spPr>
           <a:xfrm>
-            <a:off x="179512" y="1274263"/>
-            <a:ext cx="8208912" cy="923330"/>
+            <a:off x="190547" y="1787750"/>
+            <a:ext cx="8604448" cy="3282500"/>
           </a:xfrm>
           <a:prstGeom prst="rect">
             <a:avLst/>
           </a:prstGeom>
-          <a:noFill/>
         </p:spPr>
-        <p:txBody>
-          <a:bodyPr wrap="square">
-            <a:spAutoFit/>
-          </a:bodyPr>
-          <a:lstStyle/>
-          <a:p>
-            <a:pPr marL="285750" indent="-285750">
-              <a:buFont typeface="Arial" panose="020B0604020202020204" pitchFamily="34" charset="0"/>
-              <a:buChar char="•"/>
-            </a:pPr>
-            <a:r>
-              <a:rPr lang="en-US" dirty="0"/>
-              <a:t>Phases of the project with estimated timeframes</a:t>
-            </a:r>
-          </a:p>
-          <a:p>
-            <a:pPr marL="285750" indent="-285750">
-              <a:buFont typeface="Arial" panose="020B0604020202020204" pitchFamily="34" charset="0"/>
-              <a:buChar char="•"/>
-            </a:pPr>
-            <a:endParaRPr lang="en-US" dirty="0"/>
-          </a:p>
-          <a:p>
-            <a:pPr marL="285750" indent="-285750">
-              <a:buFont typeface="Arial" panose="020B0604020202020204" pitchFamily="34" charset="0"/>
-              <a:buChar char="•"/>
-            </a:pPr>
-            <a:r>
-              <a:rPr lang="en-US" dirty="0"/>
-              <a:t>Gantt chart or simple timeline format</a:t>
-            </a:r>
-          </a:p>
-        </p:txBody>
-      </p:sp>
+      </p:pic>
     </p:spTree>
     <p:extLst>
       <p:ext uri="{BB962C8B-B14F-4D97-AF65-F5344CB8AC3E}">
@@ -5304,7 +5619,7 @@
               <a:buSzPct val="25000"/>
             </a:pPr>
             <a:r>
-              <a:rPr lang="en-IN" sz="2400" b="1" dirty="0" smtClean="0">
+              <a:rPr lang="en-IN" sz="2400" b="1" dirty="0">
                 <a:solidFill>
                   <a:srgbClr val="0070C0"/>
                 </a:solidFill>
@@ -5312,18 +5627,7 @@
                 <a:cs typeface="Times New Roman" panose="02020603050405020304" pitchFamily="18" charset="0"/>
                 <a:sym typeface="Arial"/>
               </a:rPr>
-              <a:t>Pre-Final </a:t>
-            </a:r>
-            <a:r>
-              <a:rPr lang="en-IN" sz="2400" b="1" dirty="0">
-                <a:solidFill>
-                  <a:srgbClr val="0070C0"/>
-                </a:solidFill>
-                <a:ea typeface="Cambria" panose="02040503050406030204" pitchFamily="18" charset="0"/>
-                <a:cs typeface="Times New Roman" panose="02020603050405020304" pitchFamily="18" charset="0"/>
-                <a:sym typeface="Arial"/>
-              </a:rPr>
-              <a:t>Year Project Synopsis</a:t>
+              <a:t>Pre-Final Year Project Synopsis</a:t>
             </a:r>
           </a:p>
           <a:p>
@@ -5349,7 +5653,7 @@
           <p:cNvPr id="2" name="Table 2">
             <a:extLst>
               <a:ext uri="{FF2B5EF4-FFF2-40B4-BE49-F238E27FC236}">
-                <a16:creationId xmlns="" xmlns:a16="http://schemas.microsoft.com/office/drawing/2014/main" id="{232DFD41-0025-28B4-FE3B-A54FAEE28F42}"/>
+                <a16:creationId xmlns:a16="http://schemas.microsoft.com/office/drawing/2014/main" id="{232DFD41-0025-28B4-FE3B-A54FAEE28F42}"/>
               </a:ext>
             </a:extLst>
           </p:cNvPr>
@@ -5359,14 +5663,14 @@
           <p:nvPr>
             <p:extLst>
               <p:ext uri="{D42A27DB-BD31-4B8C-83A1-F6EECF244321}">
-                <p14:modId xmlns:p14="http://schemas.microsoft.com/office/powerpoint/2010/main" val="2637624349"/>
+                <p14:modId xmlns:p14="http://schemas.microsoft.com/office/powerpoint/2010/main" val="1270320117"/>
               </p:ext>
             </p:extLst>
           </p:nvPr>
         </p:nvGraphicFramePr>
         <p:xfrm>
           <a:off x="1696134" y="3086002"/>
-          <a:ext cx="6096000" cy="1854200"/>
+          <a:ext cx="6096000" cy="2225040"/>
         </p:xfrm>
         <a:graphic>
           <a:graphicData uri="http://schemas.openxmlformats.org/drawingml/2006/table">
@@ -5378,14 +5682,14 @@
                 <a:gridCol w="3048000">
                   <a:extLst>
                     <a:ext uri="{9D8B030D-6E8A-4147-A177-3AD203B41FA5}">
-                      <a16:colId xmlns="" xmlns:a16="http://schemas.microsoft.com/office/drawing/2014/main" val="3537270469"/>
+                      <a16:colId xmlns:a16="http://schemas.microsoft.com/office/drawing/2014/main" val="3537270469"/>
                     </a:ext>
                   </a:extLst>
                 </a:gridCol>
                 <a:gridCol w="3048000">
                   <a:extLst>
                     <a:ext uri="{9D8B030D-6E8A-4147-A177-3AD203B41FA5}">
-                      <a16:colId xmlns="" xmlns:a16="http://schemas.microsoft.com/office/drawing/2014/main" val="3305024946"/>
+                      <a16:colId xmlns:a16="http://schemas.microsoft.com/office/drawing/2014/main" val="3305024946"/>
                     </a:ext>
                   </a:extLst>
                 </a:gridCol>
@@ -5421,7 +5725,7 @@
                 </a:tc>
                 <a:extLst>
                   <a:ext uri="{0D108BD9-81ED-4DB2-BD59-A6C34878D82A}">
-                    <a16:rowId xmlns="" xmlns:a16="http://schemas.microsoft.com/office/drawing/2014/main" val="1765898331"/>
+                    <a16:rowId xmlns:a16="http://schemas.microsoft.com/office/drawing/2014/main" val="1765898331"/>
                   </a:ext>
                 </a:extLst>
               </a:tr>
@@ -5431,7 +5735,10 @@
                     <a:bodyPr/>
                     <a:lstStyle/>
                     <a:p>
-                      <a:endParaRPr lang="en-US"/>
+                      <a:r>
+                        <a:rPr lang="en-US" dirty="0"/>
+                        <a:t>2401830002</a:t>
+                      </a:r>
                     </a:p>
                   </a:txBody>
                   <a:tcPr/>
@@ -5441,14 +5748,17 @@
                     <a:bodyPr/>
                     <a:lstStyle/>
                     <a:p>
-                      <a:endParaRPr lang="en-US" dirty="0"/>
+                      <a:r>
+                        <a:rPr lang="en-US" dirty="0"/>
+                        <a:t>Naman Katewa</a:t>
+                      </a:r>
                     </a:p>
                   </a:txBody>
                   <a:tcPr/>
                 </a:tc>
                 <a:extLst>
                   <a:ext uri="{0D108BD9-81ED-4DB2-BD59-A6C34878D82A}">
-                    <a16:rowId xmlns="" xmlns:a16="http://schemas.microsoft.com/office/drawing/2014/main" val="4176101868"/>
+                    <a16:rowId xmlns:a16="http://schemas.microsoft.com/office/drawing/2014/main" val="4176101868"/>
                   </a:ext>
                 </a:extLst>
               </a:tr>
@@ -5458,7 +5768,10 @@
                     <a:bodyPr/>
                     <a:lstStyle/>
                     <a:p>
-                      <a:endParaRPr lang="en-US" dirty="0"/>
+                      <a:r>
+                        <a:rPr lang="en-US" dirty="0"/>
+                        <a:t>2401840003</a:t>
+                      </a:r>
                     </a:p>
                   </a:txBody>
                   <a:tcPr/>
@@ -5468,14 +5781,17 @@
                     <a:bodyPr/>
                     <a:lstStyle/>
                     <a:p>
-                      <a:endParaRPr lang="en-US" dirty="0"/>
+                      <a:r>
+                        <a:rPr lang="en-US" dirty="0"/>
+                        <a:t>Sneha Yadav</a:t>
+                      </a:r>
                     </a:p>
                   </a:txBody>
                   <a:tcPr/>
                 </a:tc>
                 <a:extLst>
                   <a:ext uri="{0D108BD9-81ED-4DB2-BD59-A6C34878D82A}">
-                    <a16:rowId xmlns="" xmlns:a16="http://schemas.microsoft.com/office/drawing/2014/main" val="1958206324"/>
+                    <a16:rowId xmlns:a16="http://schemas.microsoft.com/office/drawing/2014/main" val="1958206324"/>
                   </a:ext>
                 </a:extLst>
               </a:tr>
@@ -5485,7 +5801,10 @@
                     <a:bodyPr/>
                     <a:lstStyle/>
                     <a:p>
-                      <a:endParaRPr lang="en-US" dirty="0"/>
+                      <a:r>
+                        <a:rPr lang="en-US" dirty="0"/>
+                        <a:t>2401840006</a:t>
+                      </a:r>
                     </a:p>
                   </a:txBody>
                   <a:tcPr/>
@@ -5495,14 +5814,17 @@
                     <a:bodyPr/>
                     <a:lstStyle/>
                     <a:p>
-                      <a:endParaRPr lang="en-US" dirty="0"/>
+                      <a:r>
+                        <a:rPr lang="en-US" dirty="0"/>
+                        <a:t>Akshaya Tanwar</a:t>
+                      </a:r>
                     </a:p>
                   </a:txBody>
                   <a:tcPr/>
                 </a:tc>
                 <a:extLst>
                   <a:ext uri="{0D108BD9-81ED-4DB2-BD59-A6C34878D82A}">
-                    <a16:rowId xmlns="" xmlns:a16="http://schemas.microsoft.com/office/drawing/2014/main" val="441949598"/>
+                    <a16:rowId xmlns:a16="http://schemas.microsoft.com/office/drawing/2014/main" val="441949598"/>
                   </a:ext>
                 </a:extLst>
               </a:tr>
@@ -5512,7 +5834,10 @@
                     <a:bodyPr/>
                     <a:lstStyle/>
                     <a:p>
-                      <a:endParaRPr lang="en-US" dirty="0"/>
+                      <a:r>
+                        <a:rPr lang="en-US" dirty="0"/>
+                        <a:t>2401840008</a:t>
+                      </a:r>
                     </a:p>
                   </a:txBody>
                   <a:tcPr/>
@@ -5522,14 +5847,50 @@
                     <a:bodyPr/>
                     <a:lstStyle/>
                     <a:p>
-                      <a:endParaRPr lang="en-US" dirty="0"/>
+                      <a:r>
+                        <a:rPr lang="en-US" dirty="0"/>
+                        <a:t>Nikita Saharan</a:t>
+                      </a:r>
                     </a:p>
                   </a:txBody>
                   <a:tcPr/>
                 </a:tc>
                 <a:extLst>
                   <a:ext uri="{0D108BD9-81ED-4DB2-BD59-A6C34878D82A}">
-                    <a16:rowId xmlns="" xmlns:a16="http://schemas.microsoft.com/office/drawing/2014/main" val="3043375068"/>
+                    <a16:rowId xmlns:a16="http://schemas.microsoft.com/office/drawing/2014/main" val="3043375068"/>
+                  </a:ext>
+                </a:extLst>
+              </a:tr>
+              <a:tr h="370840">
+                <a:tc>
+                  <a:txBody>
+                    <a:bodyPr/>
+                    <a:lstStyle/>
+                    <a:p>
+                      <a:r>
+                        <a:rPr lang="en-US" dirty="0"/>
+                        <a:t>2401720014</a:t>
+                      </a:r>
+                    </a:p>
+                  </a:txBody>
+                  <a:tcPr/>
+                </a:tc>
+                <a:tc>
+                  <a:txBody>
+                    <a:bodyPr/>
+                    <a:lstStyle/>
+                    <a:p>
+                      <a:r>
+                        <a:rPr lang="en-US" dirty="0"/>
+                        <a:t>Kartikeya Drall</a:t>
+                      </a:r>
+                    </a:p>
+                  </a:txBody>
+                  <a:tcPr/>
+                </a:tc>
+                <a:extLst>
+                  <a:ext uri="{0D108BD9-81ED-4DB2-BD59-A6C34878D82A}">
+                    <a16:rowId xmlns:a16="http://schemas.microsoft.com/office/drawing/2014/main" val="2943472739"/>
                   </a:ext>
                 </a:extLst>
               </a:tr>
@@ -5542,7 +5903,7 @@
           <p:cNvPr id="5" name="TextBox 4">
             <a:extLst>
               <a:ext uri="{FF2B5EF4-FFF2-40B4-BE49-F238E27FC236}">
-                <a16:creationId xmlns="" xmlns:a16="http://schemas.microsoft.com/office/drawing/2014/main" id="{3DF18845-4075-32C5-8F4A-4F40F86E837F}"/>
+                <a16:creationId xmlns:a16="http://schemas.microsoft.com/office/drawing/2014/main" id="{3DF18845-4075-32C5-8F4A-4F40F86E837F}"/>
               </a:ext>
             </a:extLst>
           </p:cNvPr>
@@ -5551,8 +5912,8 @@
         </p:nvSpPr>
         <p:spPr>
           <a:xfrm>
-            <a:off x="2299287" y="1212054"/>
-            <a:ext cx="4659282" cy="707886"/>
+            <a:off x="236441" y="1212054"/>
+            <a:ext cx="8584032" cy="707886"/>
           </a:xfrm>
           <a:prstGeom prst="rect">
             <a:avLst/>
@@ -5577,27 +5938,8 @@
                 <a:cs typeface="Times New Roman" panose="02020603050405020304" pitchFamily="18" charset="0"/>
                 <a:sym typeface="Arial"/>
               </a:rPr>
-              <a:t>Project </a:t>
-            </a:r>
-            <a:r>
-              <a:rPr lang="en-IN" sz="4000" b="1" dirty="0" smtClean="0">
-                <a:solidFill>
-                  <a:srgbClr val="C00000"/>
-                </a:solidFill>
-                <a:ea typeface="Cambria" panose="02040503050406030204" pitchFamily="18" charset="0"/>
-                <a:cs typeface="Times New Roman" panose="02020603050405020304" pitchFamily="18" charset="0"/>
-                <a:sym typeface="Arial"/>
-              </a:rPr>
-              <a:t>Title</a:t>
-            </a:r>
-            <a:endParaRPr lang="en-IN" sz="4000" b="1" dirty="0">
-              <a:solidFill>
-                <a:srgbClr val="C00000"/>
-              </a:solidFill>
-              <a:ea typeface="Cambria" panose="02040503050406030204" pitchFamily="18" charset="0"/>
-              <a:cs typeface="Times New Roman" panose="02020603050405020304" pitchFamily="18" charset="0"/>
-              <a:sym typeface="Arial"/>
-            </a:endParaRPr>
+              <a:t>University Fleet Optimization System</a:t>
+            </a:r>
           </a:p>
         </p:txBody>
       </p:sp>
@@ -5606,7 +5948,7 @@
           <p:cNvPr id="8" name="TextBox 7">
             <a:extLst>
               <a:ext uri="{FF2B5EF4-FFF2-40B4-BE49-F238E27FC236}">
-                <a16:creationId xmlns="" xmlns:a16="http://schemas.microsoft.com/office/drawing/2014/main" id="{40D4C745-33B7-0116-E20F-11A7F0DFD46F}"/>
+                <a16:creationId xmlns:a16="http://schemas.microsoft.com/office/drawing/2014/main" id="{40D4C745-33B7-0116-E20F-11A7F0DFD46F}"/>
               </a:ext>
             </a:extLst>
           </p:cNvPr>
@@ -5633,7 +5975,7 @@
               <a:buSzPct val="25000"/>
             </a:pPr>
             <a:r>
-              <a:rPr lang="en-IN" b="1" dirty="0" smtClean="0">
+              <a:rPr lang="en-IN" b="1" dirty="0">
                 <a:solidFill>
                   <a:srgbClr val="0070C0"/>
                 </a:solidFill>
@@ -5641,18 +5983,7 @@
                 <a:cs typeface="Times New Roman" panose="02020603050405020304" pitchFamily="18" charset="0"/>
                 <a:sym typeface="Arial"/>
               </a:rPr>
-              <a:t>Faculty </a:t>
-            </a:r>
-            <a:r>
-              <a:rPr lang="en-IN" b="1" dirty="0">
-                <a:solidFill>
-                  <a:srgbClr val="0070C0"/>
-                </a:solidFill>
-                <a:ea typeface="Cambria" panose="02040503050406030204" pitchFamily="18" charset="0"/>
-                <a:cs typeface="Times New Roman" panose="02020603050405020304" pitchFamily="18" charset="0"/>
-                <a:sym typeface="Arial"/>
-              </a:rPr>
-              <a:t>Mentor:</a:t>
+              <a:t>Faculty Mentor:</a:t>
             </a:r>
             <a:r>
               <a:rPr lang="en-IN" sz="1800" b="1" dirty="0">
@@ -5665,6 +5996,25 @@
               </a:rPr>
               <a:t> </a:t>
             </a:r>
+            <a:r>
+              <a:rPr lang="en-IN" b="1" dirty="0">
+                <a:solidFill>
+                  <a:srgbClr val="0070C0"/>
+                </a:solidFill>
+                <a:ea typeface="Cambria" panose="02040503050406030204" pitchFamily="18" charset="0"/>
+                <a:cs typeface="Times New Roman" panose="02020603050405020304" pitchFamily="18" charset="0"/>
+                <a:sym typeface="Arial"/>
+              </a:rPr>
+              <a:t>Ms. Rishika Mehta</a:t>
+            </a:r>
+            <a:endParaRPr lang="en-IN" sz="1800" b="1" dirty="0">
+              <a:solidFill>
+                <a:srgbClr val="0070C0"/>
+              </a:solidFill>
+              <a:ea typeface="Cambria" panose="02040503050406030204" pitchFamily="18" charset="0"/>
+              <a:cs typeface="Times New Roman" panose="02020603050405020304" pitchFamily="18" charset="0"/>
+              <a:sym typeface="Arial"/>
+            </a:endParaRPr>
           </a:p>
         </p:txBody>
       </p:sp>
@@ -5698,35 +6048,6 @@
           <a:chExt cx="0" cy="0"/>
         </a:xfrm>
       </p:grpSpPr>
-      <p:pic>
-        <p:nvPicPr>
-          <p:cNvPr id="4" name="Content Placeholder 3"/>
-          <p:cNvPicPr>
-            <a:picLocks noGrp="1" noChangeAspect="1"/>
-          </p:cNvPicPr>
-          <p:nvPr>
-            <p:ph idx="1"/>
-          </p:nvPr>
-        </p:nvPicPr>
-        <p:blipFill>
-          <a:blip r:embed="rId3" cstate="print">
-            <a:extLst>
-              <a:ext uri="{28A0092B-C50C-407E-A947-70E740481C1C}">
-                <a14:useLocalDpi xmlns:a14="http://schemas.microsoft.com/office/drawing/2010/main" val="0"/>
-              </a:ext>
-            </a:extLst>
-          </a:blip>
-          <a:stretch>
-            <a:fillRect/>
-          </a:stretch>
-        </p:blipFill>
-        <p:spPr>
-          <a:xfrm>
-            <a:off x="1" y="0"/>
-            <a:ext cx="9180512" cy="6885384"/>
-          </a:xfrm>
-        </p:spPr>
-      </p:pic>
       <p:sp>
         <p:nvSpPr>
           <p:cNvPr id="5" name="Rectangle 1"/>
@@ -5852,7 +6173,7 @@
           <p:nvPr/>
         </p:nvPicPr>
         <p:blipFill>
-          <a:blip r:embed="rId4" cstate="print">
+          <a:blip r:embed="rId3" cstate="print">
             <a:extLst>
               <a:ext uri="{28A0092B-C50C-407E-A947-70E740481C1C}">
                 <a14:useLocalDpi xmlns:a14="http://schemas.microsoft.com/office/drawing/2010/main" val="0"/>
@@ -5875,60 +6196,490 @@
       </p:pic>
       <p:sp>
         <p:nvSpPr>
-          <p:cNvPr id="6" name="TextBox 5">
+          <p:cNvPr id="12" name="Rectangle 3">
             <a:extLst>
               <a:ext uri="{FF2B5EF4-FFF2-40B4-BE49-F238E27FC236}">
-                <a16:creationId xmlns="" xmlns:a16="http://schemas.microsoft.com/office/drawing/2014/main" id="{AE24D516-77C6-C96A-5F77-D099623448D8}"/>
+                <a16:creationId xmlns:a16="http://schemas.microsoft.com/office/drawing/2014/main" id="{C01F9148-249C-53EB-C9D8-998CE4283F51}"/>
               </a:ext>
             </a:extLst>
           </p:cNvPr>
-          <p:cNvSpPr txBox="1"/>
-          <p:nvPr/>
-        </p:nvSpPr>
-        <p:spPr>
+          <p:cNvSpPr>
+            <a:spLocks noGrp="1" noChangeArrowheads="1"/>
+          </p:cNvSpPr>
+          <p:nvPr>
+            <p:ph idx="1"/>
+          </p:nvPr>
+        </p:nvSpPr>
+        <p:spPr bwMode="auto">
           <a:xfrm>
-            <a:off x="179512" y="1293834"/>
-            <a:ext cx="8784976" cy="372794"/>
+            <a:off x="727537" y="1023700"/>
+            <a:ext cx="7725437" cy="5632311"/>
           </a:xfrm>
           <a:prstGeom prst="rect">
             <a:avLst/>
           </a:prstGeom>
           <a:noFill/>
+          <a:ln>
+            <a:noFill/>
+          </a:ln>
+          <a:effectLst/>
+          <a:extLst>
+            <a:ext uri="{909E8E84-426E-40DD-AFC4-6F175D3DCCD1}">
+              <a14:hiddenFill xmlns:a14="http://schemas.microsoft.com/office/drawing/2010/main">
+                <a:solidFill>
+                  <a:schemeClr val="accent1"/>
+                </a:solidFill>
+              </a14:hiddenFill>
+            </a:ext>
+            <a:ext uri="{91240B29-F687-4F45-9708-019B960494DF}">
+              <a14:hiddenLine xmlns:a14="http://schemas.microsoft.com/office/drawing/2010/main" w="9525">
+                <a:solidFill>
+                  <a:schemeClr val="tx1"/>
+                </a:solidFill>
+                <a:miter lim="800000"/>
+                <a:headEnd/>
+                <a:tailEnd/>
+              </a14:hiddenLine>
+            </a:ext>
+            <a:ext uri="{AF507438-7753-43E0-B8FC-AC1667EBCBE1}">
+              <a14:hiddenEffects xmlns:a14="http://schemas.microsoft.com/office/drawing/2010/main">
+                <a:effectLst>
+                  <a:outerShdw dist="35921" dir="2700000" algn="ctr" rotWithShape="0">
+                    <a:schemeClr val="bg2"/>
+                  </a:outerShdw>
+                </a:effectLst>
+              </a14:hiddenEffects>
+            </a:ext>
+          </a:extLst>
         </p:spPr>
         <p:txBody>
-          <a:bodyPr wrap="square">
+          <a:bodyPr vert="horz" wrap="square" lIns="91440" tIns="45720" rIns="91440" bIns="45720" numCol="1" anchor="ctr" anchorCtr="0" compatLnSpc="1">
+            <a:prstTxWarp prst="textNoShape">
+              <a:avLst/>
+            </a:prstTxWarp>
             <a:spAutoFit/>
           </a:bodyPr>
           <a:lstStyle/>
           <a:p>
-            <a:pPr marL="0" marR="0" algn="just" fontAlgn="base">
+            <a:pPr marL="0" marR="0" lvl="0" indent="0" algn="l" defTabSz="914400" rtl="0" eaLnBrk="0" fontAlgn="base" latinLnBrk="0" hangingPunct="0">
               <a:lnSpc>
-                <a:spcPct val="107000"/>
+                <a:spcPct val="100000"/>
               </a:lnSpc>
               <a:spcBef>
-                <a:spcPts val="0"/>
+                <a:spcPct val="0"/>
               </a:spcBef>
               <a:spcAft>
-                <a:spcPts val="0"/>
+                <a:spcPct val="0"/>
               </a:spcAft>
+              <a:buClrTx/>
+              <a:buSzTx/>
+              <a:buNone/>
+              <a:tabLst/>
             </a:pPr>
             <a:r>
-              <a:rPr lang="en-US" sz="1800" kern="100" dirty="0">
-                <a:solidFill>
-                  <a:srgbClr val="000000"/>
+              <a:rPr kumimoji="0" lang="en-US" altLang="en-US" sz="1800" b="1" i="0" u="none" strike="noStrike" cap="none" normalizeH="0" baseline="0" dirty="0">
+                <a:ln>
+                  <a:noFill/>
+                </a:ln>
+                <a:solidFill>
+                  <a:schemeClr val="tx1"/>
                 </a:solidFill>
                 <a:effectLst/>
                 <a:latin typeface="Verdana" panose="020B0604030504040204" pitchFamily="34" charset="0"/>
-                <a:ea typeface="Times New Roman" panose="02020603050405020304" pitchFamily="18" charset="0"/>
-                <a:cs typeface="Times New Roman" panose="02020603050405020304" pitchFamily="18" charset="0"/>
+                <a:ea typeface="Verdana" panose="020B0604030504040204" pitchFamily="34" charset="0"/>
               </a:rPr>
-              <a:t> </a:t>
-            </a:r>
-            <a:endParaRPr lang="en-US" sz="2800" kern="100" dirty="0">
+              <a:t>The Problem:</a:t>
+            </a:r>
+            <a:endParaRPr kumimoji="0" lang="en-US" altLang="en-US" sz="1800" b="0" i="0" u="none" strike="noStrike" cap="none" normalizeH="0" baseline="0" dirty="0">
+              <a:ln>
+                <a:noFill/>
+              </a:ln>
+              <a:solidFill>
+                <a:schemeClr val="tx1"/>
+              </a:solidFill>
               <a:effectLst/>
-              <a:latin typeface="+mj-lt"/>
-              <a:ea typeface="Calibri" panose="020F0502020204030204" pitchFamily="34" charset="0"/>
-              <a:cs typeface="Times New Roman" panose="02020603050405020304" pitchFamily="18" charset="0"/>
+              <a:latin typeface="Verdana" panose="020B0604030504040204" pitchFamily="34" charset="0"/>
+              <a:ea typeface="Verdana" panose="020B0604030504040204" pitchFamily="34" charset="0"/>
+            </a:endParaRPr>
+          </a:p>
+          <a:p>
+            <a:pPr marL="0" marR="0" lvl="0" indent="0" algn="l" defTabSz="914400" rtl="0" eaLnBrk="0" fontAlgn="base" latinLnBrk="0" hangingPunct="0">
+              <a:lnSpc>
+                <a:spcPct val="100000"/>
+              </a:lnSpc>
+              <a:spcBef>
+                <a:spcPct val="0"/>
+              </a:spcBef>
+              <a:spcAft>
+                <a:spcPct val="0"/>
+              </a:spcAft>
+              <a:buClrTx/>
+              <a:buSzTx/>
+              <a:buNone/>
+              <a:tabLst/>
+            </a:pPr>
+            <a:r>
+              <a:rPr kumimoji="0" lang="en-US" altLang="en-US" sz="1800" b="0" i="0" u="none" strike="noStrike" cap="none" normalizeH="0" baseline="0" dirty="0">
+                <a:ln>
+                  <a:noFill/>
+                </a:ln>
+                <a:solidFill>
+                  <a:schemeClr val="tx1"/>
+                </a:solidFill>
+                <a:effectLst/>
+                <a:latin typeface="Verdana" panose="020B0604030504040204" pitchFamily="34" charset="0"/>
+                <a:ea typeface="Verdana" panose="020B0604030504040204" pitchFamily="34" charset="0"/>
+              </a:rPr>
+              <a:t>Managing university transportation across a massive catchment area(Sohna, Gurugram, Faridabad, Palwal, Noida, Bhiwadi) is manually intensive.</a:t>
+            </a:r>
+          </a:p>
+          <a:p>
+            <a:pPr marL="0" marR="0" lvl="0" indent="0" algn="l" defTabSz="914400" rtl="0" eaLnBrk="0" fontAlgn="base" latinLnBrk="0" hangingPunct="0">
+              <a:lnSpc>
+                <a:spcPct val="100000"/>
+              </a:lnSpc>
+              <a:spcBef>
+                <a:spcPct val="0"/>
+              </a:spcBef>
+              <a:spcAft>
+                <a:spcPct val="0"/>
+              </a:spcAft>
+              <a:buClrTx/>
+              <a:buSzTx/>
+              <a:buNone/>
+              <a:tabLst/>
+            </a:pPr>
+            <a:r>
+              <a:rPr kumimoji="0" lang="en-US" altLang="en-US" sz="1800" b="0" i="0" u="none" strike="noStrike" cap="none" normalizeH="0" baseline="0" dirty="0">
+                <a:ln>
+                  <a:noFill/>
+                </a:ln>
+                <a:solidFill>
+                  <a:schemeClr val="tx1"/>
+                </a:solidFill>
+                <a:effectLst/>
+                <a:latin typeface="Verdana" panose="020B0604030504040204" pitchFamily="34" charset="0"/>
+                <a:ea typeface="Verdana" panose="020B0604030504040204" pitchFamily="34" charset="0"/>
+              </a:rPr>
+              <a:t>Current fixed routes lead to inefficiencies, high fuel costs, and uneven student loads.</a:t>
+            </a:r>
+          </a:p>
+          <a:p>
+            <a:pPr marL="0" marR="0" lvl="0" indent="0" algn="l" defTabSz="914400" rtl="0" eaLnBrk="0" fontAlgn="base" latinLnBrk="0" hangingPunct="0">
+              <a:lnSpc>
+                <a:spcPct val="100000"/>
+              </a:lnSpc>
+              <a:spcBef>
+                <a:spcPct val="0"/>
+              </a:spcBef>
+              <a:spcAft>
+                <a:spcPct val="0"/>
+              </a:spcAft>
+              <a:buClrTx/>
+              <a:buSzTx/>
+              <a:buNone/>
+              <a:tabLst/>
+            </a:pPr>
+            <a:endParaRPr kumimoji="0" lang="en-US" altLang="en-US" sz="1800" b="1" i="0" u="none" strike="noStrike" cap="none" normalizeH="0" baseline="0" dirty="0">
+              <a:ln>
+                <a:noFill/>
+              </a:ln>
+              <a:solidFill>
+                <a:schemeClr val="tx1"/>
+              </a:solidFill>
+              <a:effectLst/>
+              <a:latin typeface="Verdana" panose="020B0604030504040204" pitchFamily="34" charset="0"/>
+              <a:ea typeface="Verdana" panose="020B0604030504040204" pitchFamily="34" charset="0"/>
+            </a:endParaRPr>
+          </a:p>
+          <a:p>
+            <a:pPr marL="0" marR="0" lvl="0" indent="0" algn="l" defTabSz="914400" rtl="0" eaLnBrk="0" fontAlgn="base" latinLnBrk="0" hangingPunct="0">
+              <a:lnSpc>
+                <a:spcPct val="100000"/>
+              </a:lnSpc>
+              <a:spcBef>
+                <a:spcPct val="0"/>
+              </a:spcBef>
+              <a:spcAft>
+                <a:spcPct val="0"/>
+              </a:spcAft>
+              <a:buClrTx/>
+              <a:buSzTx/>
+              <a:buNone/>
+              <a:tabLst/>
+            </a:pPr>
+            <a:endParaRPr kumimoji="0" lang="en-US" altLang="en-US" sz="1800" b="1" i="0" u="none" strike="noStrike" cap="none" normalizeH="0" baseline="0" dirty="0">
+              <a:ln>
+                <a:noFill/>
+              </a:ln>
+              <a:solidFill>
+                <a:schemeClr val="tx1"/>
+              </a:solidFill>
+              <a:effectLst/>
+              <a:latin typeface="Verdana" panose="020B0604030504040204" pitchFamily="34" charset="0"/>
+              <a:ea typeface="Verdana" panose="020B0604030504040204" pitchFamily="34" charset="0"/>
+            </a:endParaRPr>
+          </a:p>
+          <a:p>
+            <a:pPr marL="0" marR="0" lvl="0" indent="0" algn="l" defTabSz="914400" rtl="0" eaLnBrk="0" fontAlgn="base" latinLnBrk="0" hangingPunct="0">
+              <a:lnSpc>
+                <a:spcPct val="100000"/>
+              </a:lnSpc>
+              <a:spcBef>
+                <a:spcPct val="0"/>
+              </a:spcBef>
+              <a:spcAft>
+                <a:spcPct val="0"/>
+              </a:spcAft>
+              <a:buClrTx/>
+              <a:buSzTx/>
+              <a:buNone/>
+              <a:tabLst/>
+            </a:pPr>
+            <a:r>
+              <a:rPr kumimoji="0" lang="en-US" altLang="en-US" sz="1800" b="1" i="0" u="none" strike="noStrike" cap="none" normalizeH="0" baseline="0" dirty="0">
+                <a:ln>
+                  <a:noFill/>
+                </a:ln>
+                <a:solidFill>
+                  <a:schemeClr val="tx1"/>
+                </a:solidFill>
+                <a:effectLst/>
+                <a:latin typeface="Verdana" panose="020B0604030504040204" pitchFamily="34" charset="0"/>
+                <a:ea typeface="Verdana" panose="020B0604030504040204" pitchFamily="34" charset="0"/>
+              </a:rPr>
+              <a:t>The Solution:</a:t>
+            </a:r>
+            <a:endParaRPr kumimoji="0" lang="en-US" altLang="en-US" sz="1800" b="0" i="0" u="none" strike="noStrike" cap="none" normalizeH="0" baseline="0" dirty="0">
+              <a:ln>
+                <a:noFill/>
+              </a:ln>
+              <a:solidFill>
+                <a:schemeClr val="tx1"/>
+              </a:solidFill>
+              <a:effectLst/>
+              <a:latin typeface="Verdana" panose="020B0604030504040204" pitchFamily="34" charset="0"/>
+              <a:ea typeface="Verdana" panose="020B0604030504040204" pitchFamily="34" charset="0"/>
+            </a:endParaRPr>
+          </a:p>
+          <a:p>
+            <a:pPr marL="0" marR="0" lvl="0" indent="0" algn="l" defTabSz="914400" rtl="0" eaLnBrk="0" fontAlgn="base" latinLnBrk="0" hangingPunct="0">
+              <a:lnSpc>
+                <a:spcPct val="100000"/>
+              </a:lnSpc>
+              <a:spcBef>
+                <a:spcPct val="0"/>
+              </a:spcBef>
+              <a:spcAft>
+                <a:spcPct val="0"/>
+              </a:spcAft>
+              <a:buClrTx/>
+              <a:buSzTx/>
+              <a:buNone/>
+              <a:tabLst/>
+            </a:pPr>
+            <a:r>
+              <a:rPr kumimoji="0" lang="en-US" altLang="en-US" sz="1800" b="0" i="0" u="none" strike="noStrike" cap="none" normalizeH="0" baseline="0" dirty="0">
+                <a:ln>
+                  <a:noFill/>
+                </a:ln>
+                <a:solidFill>
+                  <a:schemeClr val="tx1"/>
+                </a:solidFill>
+                <a:effectLst/>
+                <a:latin typeface="Verdana" panose="020B0604030504040204" pitchFamily="34" charset="0"/>
+                <a:ea typeface="Verdana" panose="020B0604030504040204" pitchFamily="34" charset="0"/>
+              </a:rPr>
+              <a:t>A "Zero-Operational Cost" fleet management system built entirely on open-source technologies.</a:t>
+            </a:r>
+          </a:p>
+          <a:p>
+            <a:pPr marL="0" marR="0" lvl="0" indent="0" algn="l" defTabSz="914400" rtl="0" eaLnBrk="0" fontAlgn="base" latinLnBrk="0" hangingPunct="0">
+              <a:lnSpc>
+                <a:spcPct val="100000"/>
+              </a:lnSpc>
+              <a:spcBef>
+                <a:spcPct val="0"/>
+              </a:spcBef>
+              <a:spcAft>
+                <a:spcPct val="0"/>
+              </a:spcAft>
+              <a:buClrTx/>
+              <a:buSzTx/>
+              <a:buNone/>
+              <a:tabLst/>
+            </a:pPr>
+            <a:r>
+              <a:rPr kumimoji="0" lang="en-US" altLang="en-US" sz="1800" b="0" i="0" u="none" strike="noStrike" cap="none" normalizeH="0" baseline="0" dirty="0">
+                <a:ln>
+                  <a:noFill/>
+                </a:ln>
+                <a:solidFill>
+                  <a:schemeClr val="tx1"/>
+                </a:solidFill>
+                <a:effectLst/>
+                <a:latin typeface="Verdana" panose="020B0604030504040204" pitchFamily="34" charset="0"/>
+                <a:ea typeface="Verdana" panose="020B0604030504040204" pitchFamily="34" charset="0"/>
+              </a:rPr>
+              <a:t>Replaces expensive commercial APIs (Google Maps) with self-hosted routing engines.</a:t>
+            </a:r>
+          </a:p>
+          <a:p>
+            <a:pPr marL="0" marR="0" lvl="0" indent="0" algn="l" defTabSz="914400" rtl="0" eaLnBrk="0" fontAlgn="base" latinLnBrk="0" hangingPunct="0">
+              <a:lnSpc>
+                <a:spcPct val="100000"/>
+              </a:lnSpc>
+              <a:spcBef>
+                <a:spcPct val="0"/>
+              </a:spcBef>
+              <a:spcAft>
+                <a:spcPct val="0"/>
+              </a:spcAft>
+              <a:buClrTx/>
+              <a:buSzTx/>
+              <a:buNone/>
+              <a:tabLst/>
+            </a:pPr>
+            <a:endParaRPr kumimoji="0" lang="en-US" altLang="en-US" sz="1800" b="1" i="0" u="none" strike="noStrike" cap="none" normalizeH="0" baseline="0" dirty="0">
+              <a:ln>
+                <a:noFill/>
+              </a:ln>
+              <a:solidFill>
+                <a:schemeClr val="tx1"/>
+              </a:solidFill>
+              <a:effectLst/>
+              <a:latin typeface="Verdana" panose="020B0604030504040204" pitchFamily="34" charset="0"/>
+              <a:ea typeface="Verdana" panose="020B0604030504040204" pitchFamily="34" charset="0"/>
+            </a:endParaRPr>
+          </a:p>
+          <a:p>
+            <a:pPr marL="0" marR="0" lvl="0" indent="0" algn="l" defTabSz="914400" rtl="0" eaLnBrk="0" fontAlgn="base" latinLnBrk="0" hangingPunct="0">
+              <a:lnSpc>
+                <a:spcPct val="100000"/>
+              </a:lnSpc>
+              <a:spcBef>
+                <a:spcPct val="0"/>
+              </a:spcBef>
+              <a:spcAft>
+                <a:spcPct val="0"/>
+              </a:spcAft>
+              <a:buClrTx/>
+              <a:buSzTx/>
+              <a:buNone/>
+              <a:tabLst/>
+            </a:pPr>
+            <a:endParaRPr kumimoji="0" lang="en-US" altLang="en-US" sz="1800" b="1" i="0" u="none" strike="noStrike" cap="none" normalizeH="0" baseline="0" dirty="0">
+              <a:ln>
+                <a:noFill/>
+              </a:ln>
+              <a:solidFill>
+                <a:schemeClr val="tx1"/>
+              </a:solidFill>
+              <a:effectLst/>
+              <a:latin typeface="Verdana" panose="020B0604030504040204" pitchFamily="34" charset="0"/>
+              <a:ea typeface="Verdana" panose="020B0604030504040204" pitchFamily="34" charset="0"/>
+            </a:endParaRPr>
+          </a:p>
+          <a:p>
+            <a:pPr marL="0" marR="0" lvl="0" indent="0" algn="l" defTabSz="914400" rtl="0" eaLnBrk="0" fontAlgn="base" latinLnBrk="0" hangingPunct="0">
+              <a:lnSpc>
+                <a:spcPct val="100000"/>
+              </a:lnSpc>
+              <a:spcBef>
+                <a:spcPct val="0"/>
+              </a:spcBef>
+              <a:spcAft>
+                <a:spcPct val="0"/>
+              </a:spcAft>
+              <a:buClrTx/>
+              <a:buSzTx/>
+              <a:buNone/>
+              <a:tabLst/>
+            </a:pPr>
+            <a:r>
+              <a:rPr kumimoji="0" lang="en-US" altLang="en-US" sz="1800" b="1" i="0" u="none" strike="noStrike" cap="none" normalizeH="0" baseline="0" dirty="0">
+                <a:ln>
+                  <a:noFill/>
+                </a:ln>
+                <a:solidFill>
+                  <a:schemeClr val="tx1"/>
+                </a:solidFill>
+                <a:effectLst/>
+                <a:latin typeface="Verdana" panose="020B0604030504040204" pitchFamily="34" charset="0"/>
+                <a:ea typeface="Verdana" panose="020B0604030504040204" pitchFamily="34" charset="0"/>
+              </a:rPr>
+              <a:t>The Goal:</a:t>
+            </a:r>
+            <a:endParaRPr kumimoji="0" lang="en-US" altLang="en-US" sz="1800" b="0" i="0" u="none" strike="noStrike" cap="none" normalizeH="0" baseline="0" dirty="0">
+              <a:ln>
+                <a:noFill/>
+              </a:ln>
+              <a:solidFill>
+                <a:schemeClr val="tx1"/>
+              </a:solidFill>
+              <a:effectLst/>
+              <a:latin typeface="Verdana" panose="020B0604030504040204" pitchFamily="34" charset="0"/>
+              <a:ea typeface="Verdana" panose="020B0604030504040204" pitchFamily="34" charset="0"/>
+            </a:endParaRPr>
+          </a:p>
+          <a:p>
+            <a:pPr marL="0" marR="0" lvl="0" indent="0" algn="l" defTabSz="914400" rtl="0" eaLnBrk="0" fontAlgn="base" latinLnBrk="0" hangingPunct="0">
+              <a:lnSpc>
+                <a:spcPct val="100000"/>
+              </a:lnSpc>
+              <a:spcBef>
+                <a:spcPct val="0"/>
+              </a:spcBef>
+              <a:spcAft>
+                <a:spcPct val="0"/>
+              </a:spcAft>
+              <a:buClrTx/>
+              <a:buSzTx/>
+              <a:buNone/>
+              <a:tabLst/>
+            </a:pPr>
+            <a:r>
+              <a:rPr kumimoji="0" lang="en-US" altLang="en-US" sz="1800" b="0" i="0" u="none" strike="noStrike" cap="none" normalizeH="0" baseline="0" dirty="0">
+                <a:ln>
+                  <a:noFill/>
+                </a:ln>
+                <a:solidFill>
+                  <a:schemeClr val="tx1"/>
+                </a:solidFill>
+                <a:effectLst/>
+                <a:latin typeface="Verdana" panose="020B0604030504040204" pitchFamily="34" charset="0"/>
+                <a:ea typeface="Verdana" panose="020B0604030504040204" pitchFamily="34" charset="0"/>
+              </a:rPr>
+              <a:t>To automate route planning using mathematical optimization (VRP) to minimize fleet travel distance and ensure equitable service for distant locations.</a:t>
+            </a:r>
+          </a:p>
+          <a:p>
+            <a:pPr marL="0" marR="0" lvl="0" indent="0" algn="l" defTabSz="914400" rtl="0" eaLnBrk="0" fontAlgn="base" latinLnBrk="0" hangingPunct="0">
+              <a:lnSpc>
+                <a:spcPct val="100000"/>
+              </a:lnSpc>
+              <a:spcBef>
+                <a:spcPct val="0"/>
+              </a:spcBef>
+              <a:spcAft>
+                <a:spcPct val="0"/>
+              </a:spcAft>
+              <a:buClrTx/>
+              <a:buSzTx/>
+              <a:buFontTx/>
+              <a:buNone/>
+              <a:tabLst/>
+            </a:pPr>
+            <a:endParaRPr kumimoji="0" lang="en-US" altLang="en-US" sz="1800" b="0" i="0" u="none" strike="noStrike" cap="none" normalizeH="0" baseline="0" dirty="0">
+              <a:ln>
+                <a:noFill/>
+              </a:ln>
+              <a:solidFill>
+                <a:schemeClr val="tx1"/>
+              </a:solidFill>
+              <a:effectLst/>
+              <a:latin typeface="Verdana" panose="020B0604030504040204" pitchFamily="34" charset="0"/>
+              <a:ea typeface="Verdana" panose="020B0604030504040204" pitchFamily="34" charset="0"/>
             </a:endParaRPr>
           </a:p>
         </p:txBody>
@@ -5963,35 +6714,6 @@
           <a:chExt cx="0" cy="0"/>
         </a:xfrm>
       </p:grpSpPr>
-      <p:pic>
-        <p:nvPicPr>
-          <p:cNvPr id="4" name="Content Placeholder 3"/>
-          <p:cNvPicPr>
-            <a:picLocks noGrp="1" noChangeAspect="1"/>
-          </p:cNvPicPr>
-          <p:nvPr>
-            <p:ph idx="1"/>
-          </p:nvPr>
-        </p:nvPicPr>
-        <p:blipFill>
-          <a:blip r:embed="rId3" cstate="print">
-            <a:extLst>
-              <a:ext uri="{28A0092B-C50C-407E-A947-70E740481C1C}">
-                <a14:useLocalDpi xmlns:a14="http://schemas.microsoft.com/office/drawing/2010/main" val="0"/>
-              </a:ext>
-            </a:extLst>
-          </a:blip>
-          <a:stretch>
-            <a:fillRect/>
-          </a:stretch>
-        </p:blipFill>
-        <p:spPr>
-          <a:xfrm>
-            <a:off x="1" y="0"/>
-            <a:ext cx="9180512" cy="6885384"/>
-          </a:xfrm>
-        </p:spPr>
-      </p:pic>
       <p:sp>
         <p:nvSpPr>
           <p:cNvPr id="5" name="Rectangle 1"/>
@@ -6117,7 +6839,7 @@
           <p:nvPr/>
         </p:nvPicPr>
         <p:blipFill>
-          <a:blip r:embed="rId4" cstate="print">
+          <a:blip r:embed="rId3" cstate="print">
             <a:extLst>
               <a:ext uri="{28A0092B-C50C-407E-A947-70E740481C1C}">
                 <a14:useLocalDpi xmlns:a14="http://schemas.microsoft.com/office/drawing/2010/main" val="0"/>
@@ -6143,7 +6865,7 @@
           <p:cNvPr id="6" name="TextBox 5">
             <a:extLst>
               <a:ext uri="{FF2B5EF4-FFF2-40B4-BE49-F238E27FC236}">
-                <a16:creationId xmlns="" xmlns:a16="http://schemas.microsoft.com/office/drawing/2014/main" id="{AE24D516-77C6-C96A-5F77-D099623448D8}"/>
+                <a16:creationId xmlns:a16="http://schemas.microsoft.com/office/drawing/2014/main" id="{AE24D516-77C6-C96A-5F77-D099623448D8}"/>
               </a:ext>
             </a:extLst>
           </p:cNvPr>
@@ -6195,6 +6917,422 @@
               <a:ea typeface="Calibri" panose="020F0502020204030204" pitchFamily="34" charset="0"/>
               <a:cs typeface="Times New Roman" panose="02020603050405020304" pitchFamily="18" charset="0"/>
             </a:endParaRPr>
+          </a:p>
+        </p:txBody>
+      </p:sp>
+      <p:sp>
+        <p:nvSpPr>
+          <p:cNvPr id="8" name="Rectangle 1">
+            <a:extLst>
+              <a:ext uri="{FF2B5EF4-FFF2-40B4-BE49-F238E27FC236}">
+                <a16:creationId xmlns:a16="http://schemas.microsoft.com/office/drawing/2014/main" id="{042A318E-8EC1-F7ED-9708-F25D8CC0C0EE}"/>
+              </a:ext>
+            </a:extLst>
+          </p:cNvPr>
+          <p:cNvSpPr>
+            <a:spLocks noGrp="1" noChangeArrowheads="1"/>
+          </p:cNvSpPr>
+          <p:nvPr>
+            <p:ph idx="1"/>
+          </p:nvPr>
+        </p:nvSpPr>
+        <p:spPr bwMode="auto">
+          <a:xfrm>
+            <a:off x="462372" y="1580977"/>
+            <a:ext cx="8219256" cy="4247317"/>
+          </a:xfrm>
+          <a:prstGeom prst="rect">
+            <a:avLst/>
+          </a:prstGeom>
+          <a:noFill/>
+          <a:ln>
+            <a:noFill/>
+          </a:ln>
+          <a:effectLst/>
+          <a:extLst>
+            <a:ext uri="{909E8E84-426E-40DD-AFC4-6F175D3DCCD1}">
+              <a14:hiddenFill xmlns:a14="http://schemas.microsoft.com/office/drawing/2010/main">
+                <a:solidFill>
+                  <a:schemeClr val="accent1"/>
+                </a:solidFill>
+              </a14:hiddenFill>
+            </a:ext>
+            <a:ext uri="{91240B29-F687-4F45-9708-019B960494DF}">
+              <a14:hiddenLine xmlns:a14="http://schemas.microsoft.com/office/drawing/2010/main" w="9525">
+                <a:solidFill>
+                  <a:schemeClr val="tx1"/>
+                </a:solidFill>
+                <a:miter lim="800000"/>
+                <a:headEnd/>
+                <a:tailEnd/>
+              </a14:hiddenLine>
+            </a:ext>
+            <a:ext uri="{AF507438-7753-43E0-B8FC-AC1667EBCBE1}">
+              <a14:hiddenEffects xmlns:a14="http://schemas.microsoft.com/office/drawing/2010/main">
+                <a:effectLst>
+                  <a:outerShdw dist="35921" dir="2700000" algn="ctr" rotWithShape="0">
+                    <a:schemeClr val="bg2"/>
+                  </a:outerShdw>
+                </a:effectLst>
+              </a14:hiddenEffects>
+            </a:ext>
+          </a:extLst>
+        </p:spPr>
+        <p:txBody>
+          <a:bodyPr vert="horz" wrap="square" lIns="91440" tIns="45720" rIns="91440" bIns="45720" numCol="1" anchor="ctr" anchorCtr="0" compatLnSpc="1">
+            <a:prstTxWarp prst="textNoShape">
+              <a:avLst/>
+            </a:prstTxWarp>
+            <a:spAutoFit/>
+          </a:bodyPr>
+          <a:lstStyle/>
+          <a:p>
+            <a:pPr marL="0" marR="0" lvl="0" indent="0" algn="l" defTabSz="914400" rtl="0" eaLnBrk="0" fontAlgn="base" latinLnBrk="0" hangingPunct="0">
+              <a:lnSpc>
+                <a:spcPct val="100000"/>
+              </a:lnSpc>
+              <a:spcBef>
+                <a:spcPct val="0"/>
+              </a:spcBef>
+              <a:spcAft>
+                <a:spcPct val="0"/>
+              </a:spcAft>
+              <a:buClrTx/>
+              <a:buSzTx/>
+              <a:buNone/>
+              <a:tabLst/>
+            </a:pPr>
+            <a:r>
+              <a:rPr kumimoji="0" lang="en-US" altLang="en-US" sz="1800" b="1" i="0" u="none" strike="noStrike" cap="none" normalizeH="0" baseline="0" dirty="0">
+                <a:ln>
+                  <a:noFill/>
+                </a:ln>
+                <a:solidFill>
+                  <a:schemeClr val="tx1"/>
+                </a:solidFill>
+                <a:effectLst/>
+                <a:latin typeface="Verdana" panose="020B0604030504040204" pitchFamily="34" charset="0"/>
+                <a:ea typeface="Verdana" panose="020B0604030504040204" pitchFamily="34" charset="0"/>
+              </a:rPr>
+              <a:t>Zero-Cost Architecture:</a:t>
+            </a:r>
+            <a:endParaRPr lang="en-US" altLang="en-US" sz="1800" dirty="0">
+              <a:latin typeface="Verdana" panose="020B0604030504040204" pitchFamily="34" charset="0"/>
+              <a:ea typeface="Verdana" panose="020B0604030504040204" pitchFamily="34" charset="0"/>
+            </a:endParaRPr>
+          </a:p>
+          <a:p>
+            <a:pPr marL="0" marR="0" lvl="0" indent="0" algn="l" defTabSz="914400" rtl="0" eaLnBrk="0" fontAlgn="base" latinLnBrk="0" hangingPunct="0">
+              <a:lnSpc>
+                <a:spcPct val="100000"/>
+              </a:lnSpc>
+              <a:spcBef>
+                <a:spcPct val="0"/>
+              </a:spcBef>
+              <a:spcAft>
+                <a:spcPct val="0"/>
+              </a:spcAft>
+              <a:buClrTx/>
+              <a:buSzTx/>
+              <a:buNone/>
+              <a:tabLst/>
+            </a:pPr>
+            <a:r>
+              <a:rPr kumimoji="0" lang="en-US" altLang="en-US" sz="1800" b="0" i="0" u="none" strike="noStrike" cap="none" normalizeH="0" baseline="0" dirty="0">
+                <a:ln>
+                  <a:noFill/>
+                </a:ln>
+                <a:solidFill>
+                  <a:schemeClr val="tx1"/>
+                </a:solidFill>
+                <a:effectLst/>
+                <a:latin typeface="Verdana" panose="020B0604030504040204" pitchFamily="34" charset="0"/>
+                <a:ea typeface="Verdana" panose="020B0604030504040204" pitchFamily="34" charset="0"/>
+              </a:rPr>
+              <a:t>To achieve professional routing capabilities using self-hosted OSRM and OpenStreetMap data, eliminating recurring API fees.</a:t>
+            </a:r>
+          </a:p>
+          <a:p>
+            <a:pPr marL="0" marR="0" lvl="0" indent="0" algn="l" defTabSz="914400" rtl="0" eaLnBrk="0" fontAlgn="base" latinLnBrk="0" hangingPunct="0">
+              <a:lnSpc>
+                <a:spcPct val="100000"/>
+              </a:lnSpc>
+              <a:spcBef>
+                <a:spcPct val="0"/>
+              </a:spcBef>
+              <a:spcAft>
+                <a:spcPct val="0"/>
+              </a:spcAft>
+              <a:buClrTx/>
+              <a:buSzTx/>
+              <a:buNone/>
+              <a:tabLst/>
+            </a:pPr>
+            <a:endParaRPr kumimoji="0" lang="en-US" altLang="en-US" sz="1800" b="0" i="0" u="none" strike="noStrike" cap="none" normalizeH="0" baseline="0" dirty="0">
+              <a:ln>
+                <a:noFill/>
+              </a:ln>
+              <a:solidFill>
+                <a:schemeClr val="tx1"/>
+              </a:solidFill>
+              <a:effectLst/>
+              <a:latin typeface="Verdana" panose="020B0604030504040204" pitchFamily="34" charset="0"/>
+              <a:ea typeface="Verdana" panose="020B0604030504040204" pitchFamily="34" charset="0"/>
+            </a:endParaRPr>
+          </a:p>
+          <a:p>
+            <a:pPr marL="0" marR="0" lvl="0" indent="0" algn="l" defTabSz="914400" rtl="0" eaLnBrk="0" fontAlgn="base" latinLnBrk="0" hangingPunct="0">
+              <a:lnSpc>
+                <a:spcPct val="100000"/>
+              </a:lnSpc>
+              <a:spcBef>
+                <a:spcPct val="0"/>
+              </a:spcBef>
+              <a:spcAft>
+                <a:spcPct val="0"/>
+              </a:spcAft>
+              <a:buClrTx/>
+              <a:buSzTx/>
+              <a:buNone/>
+              <a:tabLst/>
+            </a:pPr>
+            <a:r>
+              <a:rPr kumimoji="0" lang="en-US" altLang="en-US" sz="1800" b="1" i="0" u="none" strike="noStrike" cap="none" normalizeH="0" baseline="0" dirty="0">
+                <a:ln>
+                  <a:noFill/>
+                </a:ln>
+                <a:solidFill>
+                  <a:schemeClr val="tx1"/>
+                </a:solidFill>
+                <a:effectLst/>
+                <a:latin typeface="Verdana" panose="020B0604030504040204" pitchFamily="34" charset="0"/>
+                <a:ea typeface="Verdana" panose="020B0604030504040204" pitchFamily="34" charset="0"/>
+              </a:rPr>
+              <a:t>Regional Optimization:</a:t>
+            </a:r>
+            <a:endParaRPr lang="en-US" altLang="en-US" sz="1800" dirty="0">
+              <a:latin typeface="Verdana" panose="020B0604030504040204" pitchFamily="34" charset="0"/>
+              <a:ea typeface="Verdana" panose="020B0604030504040204" pitchFamily="34" charset="0"/>
+            </a:endParaRPr>
+          </a:p>
+          <a:p>
+            <a:pPr marL="0" marR="0" lvl="0" indent="0" algn="l" defTabSz="914400" rtl="0" eaLnBrk="0" fontAlgn="base" latinLnBrk="0" hangingPunct="0">
+              <a:lnSpc>
+                <a:spcPct val="100000"/>
+              </a:lnSpc>
+              <a:spcBef>
+                <a:spcPct val="0"/>
+              </a:spcBef>
+              <a:spcAft>
+                <a:spcPct val="0"/>
+              </a:spcAft>
+              <a:buClrTx/>
+              <a:buSzTx/>
+              <a:buNone/>
+              <a:tabLst/>
+            </a:pPr>
+            <a:r>
+              <a:rPr kumimoji="0" lang="en-US" altLang="en-US" sz="1800" b="0" i="0" u="none" strike="noStrike" cap="none" normalizeH="0" baseline="0" dirty="0">
+                <a:ln>
+                  <a:noFill/>
+                </a:ln>
+                <a:solidFill>
+                  <a:schemeClr val="tx1"/>
+                </a:solidFill>
+                <a:effectLst/>
+                <a:latin typeface="Verdana" panose="020B0604030504040204" pitchFamily="34" charset="0"/>
+                <a:ea typeface="Verdana" panose="020B0604030504040204" pitchFamily="34" charset="0"/>
+              </a:rPr>
+              <a:t>To effectively model the specific road networks of Haryana and Uttar Pradesh (Extended NCR) for accurate travel time predictions.</a:t>
+            </a:r>
+          </a:p>
+          <a:p>
+            <a:pPr marL="0" marR="0" lvl="0" indent="0" algn="l" defTabSz="914400" rtl="0" eaLnBrk="0" fontAlgn="base" latinLnBrk="0" hangingPunct="0">
+              <a:lnSpc>
+                <a:spcPct val="100000"/>
+              </a:lnSpc>
+              <a:spcBef>
+                <a:spcPct val="0"/>
+              </a:spcBef>
+              <a:spcAft>
+                <a:spcPct val="0"/>
+              </a:spcAft>
+              <a:buClrTx/>
+              <a:buSzTx/>
+              <a:buNone/>
+              <a:tabLst/>
+            </a:pPr>
+            <a:endParaRPr kumimoji="0" lang="en-US" altLang="en-US" sz="1800" b="0" i="0" u="none" strike="noStrike" cap="none" normalizeH="0" baseline="0" dirty="0">
+              <a:ln>
+                <a:noFill/>
+              </a:ln>
+              <a:solidFill>
+                <a:schemeClr val="tx1"/>
+              </a:solidFill>
+              <a:effectLst/>
+              <a:latin typeface="Verdana" panose="020B0604030504040204" pitchFamily="34" charset="0"/>
+              <a:ea typeface="Verdana" panose="020B0604030504040204" pitchFamily="34" charset="0"/>
+            </a:endParaRPr>
+          </a:p>
+          <a:p>
+            <a:pPr marL="0" marR="0" lvl="0" indent="0" algn="l" defTabSz="914400" rtl="0" eaLnBrk="0" fontAlgn="base" latinLnBrk="0" hangingPunct="0">
+              <a:lnSpc>
+                <a:spcPct val="100000"/>
+              </a:lnSpc>
+              <a:spcBef>
+                <a:spcPct val="0"/>
+              </a:spcBef>
+              <a:spcAft>
+                <a:spcPct val="0"/>
+              </a:spcAft>
+              <a:buClrTx/>
+              <a:buSzTx/>
+              <a:buNone/>
+              <a:tabLst/>
+            </a:pPr>
+            <a:r>
+              <a:rPr kumimoji="0" lang="en-US" altLang="en-US" sz="1800" b="1" i="0" u="none" strike="noStrike" cap="none" normalizeH="0" baseline="0" dirty="0">
+                <a:ln>
+                  <a:noFill/>
+                </a:ln>
+                <a:solidFill>
+                  <a:schemeClr val="tx1"/>
+                </a:solidFill>
+                <a:effectLst/>
+                <a:latin typeface="Verdana" panose="020B0604030504040204" pitchFamily="34" charset="0"/>
+                <a:ea typeface="Verdana" panose="020B0604030504040204" pitchFamily="34" charset="0"/>
+              </a:rPr>
+              <a:t>Algorithmic Efficiency:</a:t>
+            </a:r>
+            <a:endParaRPr lang="en-US" altLang="en-US" sz="1800" dirty="0">
+              <a:latin typeface="Verdana" panose="020B0604030504040204" pitchFamily="34" charset="0"/>
+              <a:ea typeface="Verdana" panose="020B0604030504040204" pitchFamily="34" charset="0"/>
+            </a:endParaRPr>
+          </a:p>
+          <a:p>
+            <a:pPr marL="0" marR="0" lvl="0" indent="0" algn="l" defTabSz="914400" rtl="0" eaLnBrk="0" fontAlgn="base" latinLnBrk="0" hangingPunct="0">
+              <a:lnSpc>
+                <a:spcPct val="100000"/>
+              </a:lnSpc>
+              <a:spcBef>
+                <a:spcPct val="0"/>
+              </a:spcBef>
+              <a:spcAft>
+                <a:spcPct val="0"/>
+              </a:spcAft>
+              <a:buClrTx/>
+              <a:buSzTx/>
+              <a:buNone/>
+              <a:tabLst/>
+            </a:pPr>
+            <a:r>
+              <a:rPr kumimoji="0" lang="en-US" altLang="en-US" sz="1800" i="0" u="none" strike="noStrike" cap="none" normalizeH="0" baseline="0" dirty="0">
+                <a:ln>
+                  <a:noFill/>
+                </a:ln>
+                <a:solidFill>
+                  <a:schemeClr val="tx1"/>
+                </a:solidFill>
+                <a:effectLst/>
+                <a:latin typeface="Verdana" panose="020B0604030504040204" pitchFamily="34" charset="0"/>
+                <a:ea typeface="Verdana" panose="020B0604030504040204" pitchFamily="34" charset="0"/>
+              </a:rPr>
+              <a:t>To implement the Vehicle Routing Problem (VRP) using Google OR-Tools to mathematically minimize total fleet mileage.</a:t>
+            </a:r>
+          </a:p>
+          <a:p>
+            <a:pPr marL="0" marR="0" lvl="0" indent="0" algn="l" defTabSz="914400" rtl="0" eaLnBrk="0" fontAlgn="base" latinLnBrk="0" hangingPunct="0">
+              <a:lnSpc>
+                <a:spcPct val="100000"/>
+              </a:lnSpc>
+              <a:spcBef>
+                <a:spcPct val="0"/>
+              </a:spcBef>
+              <a:spcAft>
+                <a:spcPct val="0"/>
+              </a:spcAft>
+              <a:buClrTx/>
+              <a:buSzTx/>
+              <a:buNone/>
+              <a:tabLst/>
+            </a:pPr>
+            <a:endParaRPr kumimoji="0" lang="en-US" altLang="en-US" sz="1800" b="0" i="0" u="none" strike="noStrike" cap="none" normalizeH="0" baseline="0" dirty="0">
+              <a:ln>
+                <a:noFill/>
+              </a:ln>
+              <a:solidFill>
+                <a:schemeClr val="tx1"/>
+              </a:solidFill>
+              <a:effectLst/>
+              <a:latin typeface="Verdana" panose="020B0604030504040204" pitchFamily="34" charset="0"/>
+              <a:ea typeface="Verdana" panose="020B0604030504040204" pitchFamily="34" charset="0"/>
+            </a:endParaRPr>
+          </a:p>
+          <a:p>
+            <a:pPr marL="0" marR="0" lvl="0" indent="0" algn="l" defTabSz="914400" rtl="0" eaLnBrk="0" fontAlgn="base" latinLnBrk="0" hangingPunct="0">
+              <a:lnSpc>
+                <a:spcPct val="100000"/>
+              </a:lnSpc>
+              <a:spcBef>
+                <a:spcPct val="0"/>
+              </a:spcBef>
+              <a:spcAft>
+                <a:spcPct val="0"/>
+              </a:spcAft>
+              <a:buClrTx/>
+              <a:buSzTx/>
+              <a:buNone/>
+              <a:tabLst/>
+            </a:pPr>
+            <a:r>
+              <a:rPr kumimoji="0" lang="en-US" altLang="en-US" sz="1800" b="1" i="0" u="none" strike="noStrike" cap="none" normalizeH="0" baseline="0" dirty="0">
+                <a:ln>
+                  <a:noFill/>
+                </a:ln>
+                <a:solidFill>
+                  <a:schemeClr val="tx1"/>
+                </a:solidFill>
+                <a:effectLst/>
+                <a:latin typeface="Verdana" panose="020B0604030504040204" pitchFamily="34" charset="0"/>
+                <a:ea typeface="Verdana" panose="020B0604030504040204" pitchFamily="34" charset="0"/>
+              </a:rPr>
+              <a:t>Constraint Enforcement:</a:t>
+            </a:r>
+            <a:endParaRPr lang="en-US" altLang="en-US" sz="1800" dirty="0">
+              <a:latin typeface="Verdana" panose="020B0604030504040204" pitchFamily="34" charset="0"/>
+              <a:ea typeface="Verdana" panose="020B0604030504040204" pitchFamily="34" charset="0"/>
+            </a:endParaRPr>
+          </a:p>
+          <a:p>
+            <a:pPr marL="0" marR="0" lvl="0" indent="0" algn="l" defTabSz="914400" rtl="0" eaLnBrk="0" fontAlgn="base" latinLnBrk="0" hangingPunct="0">
+              <a:lnSpc>
+                <a:spcPct val="100000"/>
+              </a:lnSpc>
+              <a:spcBef>
+                <a:spcPct val="0"/>
+              </a:spcBef>
+              <a:spcAft>
+                <a:spcPct val="0"/>
+              </a:spcAft>
+              <a:buClrTx/>
+              <a:buSzTx/>
+              <a:buNone/>
+              <a:tabLst/>
+            </a:pPr>
+            <a:r>
+              <a:rPr kumimoji="0" lang="en-US" altLang="en-US" sz="1800" i="0" u="none" strike="noStrike" cap="none" normalizeH="0" baseline="0" dirty="0">
+                <a:ln>
+                  <a:noFill/>
+                </a:ln>
+                <a:solidFill>
+                  <a:schemeClr val="tx1"/>
+                </a:solidFill>
+                <a:effectLst/>
+                <a:latin typeface="Verdana" panose="020B0604030504040204" pitchFamily="34" charset="0"/>
+                <a:ea typeface="Verdana" panose="020B0604030504040204" pitchFamily="34" charset="0"/>
+              </a:rPr>
+              <a:t>To strictly enforce service rules: Maximum 2-hour ride time and Bus Capacity limits (e.g., 50 seats).</a:t>
+            </a:r>
           </a:p>
         </p:txBody>
       </p:sp>
@@ -6228,35 +7366,6 @@
           <a:chExt cx="0" cy="0"/>
         </a:xfrm>
       </p:grpSpPr>
-      <p:pic>
-        <p:nvPicPr>
-          <p:cNvPr id="4" name="Content Placeholder 3"/>
-          <p:cNvPicPr>
-            <a:picLocks noGrp="1" noChangeAspect="1"/>
-          </p:cNvPicPr>
-          <p:nvPr>
-            <p:ph idx="1"/>
-          </p:nvPr>
-        </p:nvPicPr>
-        <p:blipFill>
-          <a:blip r:embed="rId3" cstate="print">
-            <a:extLst>
-              <a:ext uri="{28A0092B-C50C-407E-A947-70E740481C1C}">
-                <a14:useLocalDpi xmlns:a14="http://schemas.microsoft.com/office/drawing/2010/main" val="0"/>
-              </a:ext>
-            </a:extLst>
-          </a:blip>
-          <a:stretch>
-            <a:fillRect/>
-          </a:stretch>
-        </p:blipFill>
-        <p:spPr>
-          <a:xfrm>
-            <a:off x="1" y="0"/>
-            <a:ext cx="9180512" cy="6885384"/>
-          </a:xfrm>
-        </p:spPr>
-      </p:pic>
       <p:sp>
         <p:nvSpPr>
           <p:cNvPr id="5" name="Rectangle 1"/>
@@ -6382,7 +7491,7 @@
           <p:nvPr/>
         </p:nvPicPr>
         <p:blipFill>
-          <a:blip r:embed="rId4" cstate="print">
+          <a:blip r:embed="rId3" cstate="print">
             <a:extLst>
               <a:ext uri="{28A0092B-C50C-407E-A947-70E740481C1C}">
                 <a14:useLocalDpi xmlns:a14="http://schemas.microsoft.com/office/drawing/2010/main" val="0"/>
@@ -6408,7 +7517,7 @@
           <p:cNvPr id="6" name="TextBox 5">
             <a:extLst>
               <a:ext uri="{FF2B5EF4-FFF2-40B4-BE49-F238E27FC236}">
-                <a16:creationId xmlns="" xmlns:a16="http://schemas.microsoft.com/office/drawing/2014/main" id="{AE24D516-77C6-C96A-5F77-D099623448D8}"/>
+                <a16:creationId xmlns:a16="http://schemas.microsoft.com/office/drawing/2014/main" id="{AE24D516-77C6-C96A-5F77-D099623448D8}"/>
               </a:ext>
             </a:extLst>
           </p:cNvPr>
@@ -6460,6 +7569,432 @@
               <a:ea typeface="Calibri" panose="020F0502020204030204" pitchFamily="34" charset="0"/>
               <a:cs typeface="Times New Roman" panose="02020603050405020304" pitchFamily="18" charset="0"/>
             </a:endParaRPr>
+          </a:p>
+        </p:txBody>
+      </p:sp>
+      <p:sp>
+        <p:nvSpPr>
+          <p:cNvPr id="8" name="Rectangle 1">
+            <a:extLst>
+              <a:ext uri="{FF2B5EF4-FFF2-40B4-BE49-F238E27FC236}">
+                <a16:creationId xmlns:a16="http://schemas.microsoft.com/office/drawing/2014/main" id="{B6A4BB3A-848F-94E0-C61E-3C63AFDB9FA9}"/>
+              </a:ext>
+            </a:extLst>
+          </p:cNvPr>
+          <p:cNvSpPr>
+            <a:spLocks noGrp="1" noChangeArrowheads="1"/>
+          </p:cNvSpPr>
+          <p:nvPr>
+            <p:ph idx="1"/>
+          </p:nvPr>
+        </p:nvSpPr>
+        <p:spPr bwMode="auto">
+          <a:xfrm>
+            <a:off x="444624" y="1595324"/>
+            <a:ext cx="8291264" cy="4247317"/>
+          </a:xfrm>
+          <a:prstGeom prst="rect">
+            <a:avLst/>
+          </a:prstGeom>
+          <a:noFill/>
+          <a:ln>
+            <a:noFill/>
+          </a:ln>
+          <a:effectLst/>
+          <a:extLst>
+            <a:ext uri="{909E8E84-426E-40DD-AFC4-6F175D3DCCD1}">
+              <a14:hiddenFill xmlns:a14="http://schemas.microsoft.com/office/drawing/2010/main">
+                <a:solidFill>
+                  <a:schemeClr val="accent1"/>
+                </a:solidFill>
+              </a14:hiddenFill>
+            </a:ext>
+            <a:ext uri="{91240B29-F687-4F45-9708-019B960494DF}">
+              <a14:hiddenLine xmlns:a14="http://schemas.microsoft.com/office/drawing/2010/main" w="9525">
+                <a:solidFill>
+                  <a:schemeClr val="tx1"/>
+                </a:solidFill>
+                <a:miter lim="800000"/>
+                <a:headEnd/>
+                <a:tailEnd/>
+              </a14:hiddenLine>
+            </a:ext>
+            <a:ext uri="{AF507438-7753-43E0-B8FC-AC1667EBCBE1}">
+              <a14:hiddenEffects xmlns:a14="http://schemas.microsoft.com/office/drawing/2010/main">
+                <a:effectLst>
+                  <a:outerShdw dist="35921" dir="2700000" algn="ctr" rotWithShape="0">
+                    <a:schemeClr val="bg2"/>
+                  </a:outerShdw>
+                </a:effectLst>
+              </a14:hiddenEffects>
+            </a:ext>
+          </a:extLst>
+        </p:spPr>
+        <p:txBody>
+          <a:bodyPr vert="horz" wrap="square" lIns="91440" tIns="45720" rIns="91440" bIns="45720" numCol="1" anchor="ctr" anchorCtr="0" compatLnSpc="1">
+            <a:prstTxWarp prst="textNoShape">
+              <a:avLst/>
+            </a:prstTxWarp>
+            <a:spAutoFit/>
+          </a:bodyPr>
+          <a:lstStyle/>
+          <a:p>
+            <a:pPr marL="0" marR="0" lvl="0" indent="0" algn="l" defTabSz="914400" rtl="0" eaLnBrk="0" fontAlgn="base" latinLnBrk="0" hangingPunct="0">
+              <a:lnSpc>
+                <a:spcPct val="100000"/>
+              </a:lnSpc>
+              <a:spcBef>
+                <a:spcPct val="0"/>
+              </a:spcBef>
+              <a:spcAft>
+                <a:spcPct val="0"/>
+              </a:spcAft>
+              <a:buClrTx/>
+              <a:buSzTx/>
+              <a:buNone/>
+              <a:tabLst/>
+            </a:pPr>
+            <a:r>
+              <a:rPr kumimoji="0" lang="en-US" altLang="en-US" sz="1800" b="1" i="0" u="none" strike="noStrike" cap="none" normalizeH="0" baseline="0" dirty="0">
+                <a:ln>
+                  <a:noFill/>
+                </a:ln>
+                <a:solidFill>
+                  <a:schemeClr val="tx1"/>
+                </a:solidFill>
+                <a:effectLst/>
+                <a:latin typeface="Verdana" panose="020B0604030504040204" pitchFamily="34" charset="0"/>
+                <a:ea typeface="Verdana" panose="020B0604030504040204" pitchFamily="34" charset="0"/>
+              </a:rPr>
+              <a:t>No Recurring Costs:</a:t>
+            </a:r>
+            <a:r>
+              <a:rPr kumimoji="0" lang="en-US" altLang="en-US" sz="1800" b="0" i="0" u="none" strike="noStrike" cap="none" normalizeH="0" baseline="0" dirty="0">
+                <a:ln>
+                  <a:noFill/>
+                </a:ln>
+                <a:solidFill>
+                  <a:schemeClr val="tx1"/>
+                </a:solidFill>
+                <a:effectLst/>
+                <a:latin typeface="Verdana" panose="020B0604030504040204" pitchFamily="34" charset="0"/>
+                <a:ea typeface="Verdana" panose="020B0604030504040204" pitchFamily="34" charset="0"/>
+              </a:rPr>
+              <a:t> </a:t>
+            </a:r>
+          </a:p>
+          <a:p>
+            <a:pPr marL="0" marR="0" lvl="0" indent="0" algn="l" defTabSz="914400" rtl="0" eaLnBrk="0" fontAlgn="base" latinLnBrk="0" hangingPunct="0">
+              <a:lnSpc>
+                <a:spcPct val="100000"/>
+              </a:lnSpc>
+              <a:spcBef>
+                <a:spcPct val="0"/>
+              </a:spcBef>
+              <a:spcAft>
+                <a:spcPct val="0"/>
+              </a:spcAft>
+              <a:buClrTx/>
+              <a:buSzTx/>
+              <a:buNone/>
+              <a:tabLst/>
+            </a:pPr>
+            <a:r>
+              <a:rPr kumimoji="0" lang="en-US" altLang="en-US" sz="1800" b="0" i="0" u="none" strike="noStrike" cap="none" normalizeH="0" baseline="0" dirty="0">
+                <a:ln>
+                  <a:noFill/>
+                </a:ln>
+                <a:solidFill>
+                  <a:schemeClr val="tx1"/>
+                </a:solidFill>
+                <a:effectLst/>
+                <a:latin typeface="Verdana" panose="020B0604030504040204" pitchFamily="34" charset="0"/>
+                <a:ea typeface="Verdana" panose="020B0604030504040204" pitchFamily="34" charset="0"/>
+              </a:rPr>
+              <a:t>Runs entirely on local university infrastructure or free-tier cloud services.</a:t>
+            </a:r>
+          </a:p>
+          <a:p>
+            <a:pPr marL="0" marR="0" lvl="0" indent="0" algn="l" defTabSz="914400" rtl="0" eaLnBrk="0" fontAlgn="base" latinLnBrk="0" hangingPunct="0">
+              <a:lnSpc>
+                <a:spcPct val="100000"/>
+              </a:lnSpc>
+              <a:spcBef>
+                <a:spcPct val="0"/>
+              </a:spcBef>
+              <a:spcAft>
+                <a:spcPct val="0"/>
+              </a:spcAft>
+              <a:buClrTx/>
+              <a:buSzTx/>
+              <a:buNone/>
+              <a:tabLst/>
+            </a:pPr>
+            <a:endParaRPr kumimoji="0" lang="en-US" altLang="en-US" sz="1800" b="1" i="0" u="none" strike="noStrike" cap="none" normalizeH="0" baseline="0" dirty="0">
+              <a:ln>
+                <a:noFill/>
+              </a:ln>
+              <a:solidFill>
+                <a:schemeClr val="tx1"/>
+              </a:solidFill>
+              <a:effectLst/>
+              <a:latin typeface="Verdana" panose="020B0604030504040204" pitchFamily="34" charset="0"/>
+              <a:ea typeface="Verdana" panose="020B0604030504040204" pitchFamily="34" charset="0"/>
+            </a:endParaRPr>
+          </a:p>
+          <a:p>
+            <a:pPr marL="0" marR="0" lvl="0" indent="0" algn="l" defTabSz="914400" rtl="0" eaLnBrk="0" fontAlgn="base" latinLnBrk="0" hangingPunct="0">
+              <a:lnSpc>
+                <a:spcPct val="100000"/>
+              </a:lnSpc>
+              <a:spcBef>
+                <a:spcPct val="0"/>
+              </a:spcBef>
+              <a:spcAft>
+                <a:spcPct val="0"/>
+              </a:spcAft>
+              <a:buClrTx/>
+              <a:buSzTx/>
+              <a:buNone/>
+              <a:tabLst/>
+            </a:pPr>
+            <a:r>
+              <a:rPr kumimoji="0" lang="en-US" altLang="en-US" sz="1800" b="1" i="0" u="none" strike="noStrike" cap="none" normalizeH="0" baseline="0" dirty="0">
+                <a:ln>
+                  <a:noFill/>
+                </a:ln>
+                <a:solidFill>
+                  <a:schemeClr val="tx1"/>
+                </a:solidFill>
+                <a:effectLst/>
+                <a:latin typeface="Verdana" panose="020B0604030504040204" pitchFamily="34" charset="0"/>
+                <a:ea typeface="Verdana" panose="020B0604030504040204" pitchFamily="34" charset="0"/>
+              </a:rPr>
+              <a:t>Custom Speed Profiles:</a:t>
+            </a:r>
+            <a:endParaRPr lang="en-US" altLang="en-US" sz="1800" dirty="0">
+              <a:latin typeface="Verdana" panose="020B0604030504040204" pitchFamily="34" charset="0"/>
+              <a:ea typeface="Verdana" panose="020B0604030504040204" pitchFamily="34" charset="0"/>
+            </a:endParaRPr>
+          </a:p>
+          <a:p>
+            <a:pPr marL="0" marR="0" lvl="0" indent="0" algn="l" defTabSz="914400" rtl="0" eaLnBrk="0" fontAlgn="base" latinLnBrk="0" hangingPunct="0">
+              <a:lnSpc>
+                <a:spcPct val="100000"/>
+              </a:lnSpc>
+              <a:spcBef>
+                <a:spcPct val="0"/>
+              </a:spcBef>
+              <a:spcAft>
+                <a:spcPct val="0"/>
+              </a:spcAft>
+              <a:buClrTx/>
+              <a:buSzTx/>
+              <a:buNone/>
+              <a:tabLst/>
+            </a:pPr>
+            <a:r>
+              <a:rPr kumimoji="0" lang="en-US" altLang="en-US" sz="1800" b="0" i="0" u="none" strike="noStrike" cap="none" normalizeH="0" baseline="0" dirty="0">
+                <a:ln>
+                  <a:noFill/>
+                </a:ln>
+                <a:solidFill>
+                  <a:schemeClr val="tx1"/>
+                </a:solidFill>
+                <a:effectLst/>
+                <a:latin typeface="Verdana" panose="020B0604030504040204" pitchFamily="34" charset="0"/>
+                <a:ea typeface="Verdana" panose="020B0604030504040204" pitchFamily="34" charset="0"/>
+              </a:rPr>
+              <a:t>Routing engine calibrated for "Bus" speeds in NCR traffic, not generic car speeds.</a:t>
+            </a:r>
+          </a:p>
+          <a:p>
+            <a:pPr marL="0" marR="0" lvl="0" indent="0" algn="l" defTabSz="914400" rtl="0" eaLnBrk="0" fontAlgn="base" latinLnBrk="0" hangingPunct="0">
+              <a:lnSpc>
+                <a:spcPct val="100000"/>
+              </a:lnSpc>
+              <a:spcBef>
+                <a:spcPct val="0"/>
+              </a:spcBef>
+              <a:spcAft>
+                <a:spcPct val="0"/>
+              </a:spcAft>
+              <a:buClrTx/>
+              <a:buSzTx/>
+              <a:buNone/>
+              <a:tabLst/>
+            </a:pPr>
+            <a:endParaRPr kumimoji="0" lang="en-US" altLang="en-US" sz="1800" b="1" i="0" u="none" strike="noStrike" cap="none" normalizeH="0" baseline="0" dirty="0">
+              <a:ln>
+                <a:noFill/>
+              </a:ln>
+              <a:solidFill>
+                <a:schemeClr val="tx1"/>
+              </a:solidFill>
+              <a:effectLst/>
+              <a:latin typeface="Verdana" panose="020B0604030504040204" pitchFamily="34" charset="0"/>
+              <a:ea typeface="Verdana" panose="020B0604030504040204" pitchFamily="34" charset="0"/>
+            </a:endParaRPr>
+          </a:p>
+          <a:p>
+            <a:pPr marL="0" marR="0" lvl="0" indent="0" algn="l" defTabSz="914400" rtl="0" eaLnBrk="0" fontAlgn="base" latinLnBrk="0" hangingPunct="0">
+              <a:lnSpc>
+                <a:spcPct val="100000"/>
+              </a:lnSpc>
+              <a:spcBef>
+                <a:spcPct val="0"/>
+              </a:spcBef>
+              <a:spcAft>
+                <a:spcPct val="0"/>
+              </a:spcAft>
+              <a:buClrTx/>
+              <a:buSzTx/>
+              <a:buNone/>
+              <a:tabLst/>
+            </a:pPr>
+            <a:r>
+              <a:rPr kumimoji="0" lang="en-US" altLang="en-US" sz="1800" b="1" i="0" u="none" strike="noStrike" cap="none" normalizeH="0" baseline="0" dirty="0">
+                <a:ln>
+                  <a:noFill/>
+                </a:ln>
+                <a:solidFill>
+                  <a:schemeClr val="tx1"/>
+                </a:solidFill>
+                <a:effectLst/>
+                <a:latin typeface="Verdana" panose="020B0604030504040204" pitchFamily="34" charset="0"/>
+                <a:ea typeface="Verdana" panose="020B0604030504040204" pitchFamily="34" charset="0"/>
+              </a:rPr>
+              <a:t>Strategic Comparison Mode:</a:t>
+            </a:r>
+            <a:endParaRPr lang="en-US" altLang="en-US" sz="1800" dirty="0">
+              <a:latin typeface="Verdana" panose="020B0604030504040204" pitchFamily="34" charset="0"/>
+              <a:ea typeface="Verdana" panose="020B0604030504040204" pitchFamily="34" charset="0"/>
+            </a:endParaRPr>
+          </a:p>
+          <a:p>
+            <a:pPr marL="0" marR="0" lvl="0" indent="0" algn="l" defTabSz="914400" rtl="0" eaLnBrk="0" fontAlgn="base" latinLnBrk="0" hangingPunct="0">
+              <a:lnSpc>
+                <a:spcPct val="100000"/>
+              </a:lnSpc>
+              <a:spcBef>
+                <a:spcPct val="0"/>
+              </a:spcBef>
+              <a:spcAft>
+                <a:spcPct val="0"/>
+              </a:spcAft>
+              <a:buClrTx/>
+              <a:buSzTx/>
+              <a:buNone/>
+              <a:tabLst/>
+            </a:pPr>
+            <a:r>
+              <a:rPr kumimoji="0" lang="en-US" altLang="en-US" sz="1800" b="0" i="0" u="none" strike="noStrike" cap="none" normalizeH="0" baseline="0" dirty="0">
+                <a:ln>
+                  <a:noFill/>
+                </a:ln>
+                <a:solidFill>
+                  <a:schemeClr val="tx1"/>
+                </a:solidFill>
+                <a:effectLst/>
+                <a:latin typeface="Verdana" panose="020B0604030504040204" pitchFamily="34" charset="0"/>
+                <a:ea typeface="Verdana" panose="020B0604030504040204" pitchFamily="34" charset="0"/>
+              </a:rPr>
+              <a:t>Allows admins to toggle between "Strict" plans (visit every stop) and "Suggested" plans (merge stops for efficiency).</a:t>
+            </a:r>
+          </a:p>
+          <a:p>
+            <a:pPr marL="0" marR="0" lvl="0" indent="0" algn="l" defTabSz="914400" rtl="0" eaLnBrk="0" fontAlgn="base" latinLnBrk="0" hangingPunct="0">
+              <a:lnSpc>
+                <a:spcPct val="100000"/>
+              </a:lnSpc>
+              <a:spcBef>
+                <a:spcPct val="0"/>
+              </a:spcBef>
+              <a:spcAft>
+                <a:spcPct val="0"/>
+              </a:spcAft>
+              <a:buClrTx/>
+              <a:buSzTx/>
+              <a:buNone/>
+              <a:tabLst/>
+            </a:pPr>
+            <a:endParaRPr kumimoji="0" lang="en-US" altLang="en-US" sz="1800" b="1" i="0" u="none" strike="noStrike" cap="none" normalizeH="0" baseline="0" dirty="0">
+              <a:ln>
+                <a:noFill/>
+              </a:ln>
+              <a:solidFill>
+                <a:schemeClr val="tx1"/>
+              </a:solidFill>
+              <a:effectLst/>
+              <a:latin typeface="Verdana" panose="020B0604030504040204" pitchFamily="34" charset="0"/>
+              <a:ea typeface="Verdana" panose="020B0604030504040204" pitchFamily="34" charset="0"/>
+            </a:endParaRPr>
+          </a:p>
+          <a:p>
+            <a:pPr marL="0" marR="0" lvl="0" indent="0" algn="l" defTabSz="914400" rtl="0" eaLnBrk="0" fontAlgn="base" latinLnBrk="0" hangingPunct="0">
+              <a:lnSpc>
+                <a:spcPct val="100000"/>
+              </a:lnSpc>
+              <a:spcBef>
+                <a:spcPct val="0"/>
+              </a:spcBef>
+              <a:spcAft>
+                <a:spcPct val="0"/>
+              </a:spcAft>
+              <a:buClrTx/>
+              <a:buSzTx/>
+              <a:buNone/>
+              <a:tabLst/>
+            </a:pPr>
+            <a:r>
+              <a:rPr kumimoji="0" lang="en-US" altLang="en-US" sz="1800" b="1" i="0" u="none" strike="noStrike" cap="none" normalizeH="0" baseline="0" dirty="0">
+                <a:ln>
+                  <a:noFill/>
+                </a:ln>
+                <a:solidFill>
+                  <a:schemeClr val="tx1"/>
+                </a:solidFill>
+                <a:effectLst/>
+                <a:latin typeface="Verdana" panose="020B0604030504040204" pitchFamily="34" charset="0"/>
+                <a:ea typeface="Verdana" panose="020B0604030504040204" pitchFamily="34" charset="0"/>
+              </a:rPr>
+              <a:t>Interactive Dashboard:</a:t>
+            </a:r>
+            <a:endParaRPr lang="en-US" altLang="en-US" sz="1800" dirty="0">
+              <a:latin typeface="Verdana" panose="020B0604030504040204" pitchFamily="34" charset="0"/>
+              <a:ea typeface="Verdana" panose="020B0604030504040204" pitchFamily="34" charset="0"/>
+            </a:endParaRPr>
+          </a:p>
+          <a:p>
+            <a:pPr marL="0" marR="0" lvl="0" indent="0" algn="l" defTabSz="914400" rtl="0" eaLnBrk="0" fontAlgn="base" latinLnBrk="0" hangingPunct="0">
+              <a:lnSpc>
+                <a:spcPct val="100000"/>
+              </a:lnSpc>
+              <a:spcBef>
+                <a:spcPct val="0"/>
+              </a:spcBef>
+              <a:spcAft>
+                <a:spcPct val="0"/>
+              </a:spcAft>
+              <a:buClrTx/>
+              <a:buSzTx/>
+              <a:buNone/>
+              <a:tabLst/>
+            </a:pPr>
+            <a:r>
+              <a:rPr kumimoji="0" lang="en-US" altLang="en-US" sz="1800" b="0" i="0" u="none" strike="noStrike" cap="none" normalizeH="0" baseline="0" dirty="0">
+                <a:ln>
+                  <a:noFill/>
+                </a:ln>
+                <a:solidFill>
+                  <a:schemeClr val="tx1"/>
+                </a:solidFill>
+                <a:effectLst/>
+                <a:latin typeface="Verdana" panose="020B0604030504040204" pitchFamily="34" charset="0"/>
+                <a:ea typeface="Verdana" panose="020B0604030504040204" pitchFamily="34" charset="0"/>
+              </a:rPr>
+              <a:t>A Next.js-based admin panel to visualize routes, manage student demand, and export driver schedules.</a:t>
+            </a:r>
           </a:p>
         </p:txBody>
       </p:sp>
@@ -6493,35 +8028,6 @@
           <a:chExt cx="0" cy="0"/>
         </a:xfrm>
       </p:grpSpPr>
-      <p:pic>
-        <p:nvPicPr>
-          <p:cNvPr id="4" name="Content Placeholder 3"/>
-          <p:cNvPicPr>
-            <a:picLocks noGrp="1" noChangeAspect="1"/>
-          </p:cNvPicPr>
-          <p:nvPr>
-            <p:ph idx="1"/>
-          </p:nvPr>
-        </p:nvPicPr>
-        <p:blipFill>
-          <a:blip r:embed="rId3" cstate="print">
-            <a:extLst>
-              <a:ext uri="{28A0092B-C50C-407E-A947-70E740481C1C}">
-                <a14:useLocalDpi xmlns:a14="http://schemas.microsoft.com/office/drawing/2010/main" val="0"/>
-              </a:ext>
-            </a:extLst>
-          </a:blip>
-          <a:stretch>
-            <a:fillRect/>
-          </a:stretch>
-        </p:blipFill>
-        <p:spPr>
-          <a:xfrm>
-            <a:off x="1" y="0"/>
-            <a:ext cx="9180512" cy="6885384"/>
-          </a:xfrm>
-        </p:spPr>
-      </p:pic>
       <p:sp>
         <p:nvSpPr>
           <p:cNvPr id="5" name="Rectangle 1"/>
@@ -6533,7 +8039,7 @@
         <p:spPr bwMode="auto">
           <a:xfrm>
             <a:off x="179512" y="151593"/>
-            <a:ext cx="6117380" cy="584775"/>
+            <a:ext cx="6258445" cy="584775"/>
           </a:xfrm>
           <a:prstGeom prst="rect">
             <a:avLst/>
@@ -6591,25 +8097,7 @@
                 <a:ea typeface="Times New Roman" panose="02020603050405020304" pitchFamily="18" charset="0"/>
                 <a:cs typeface="Times New Roman" panose="02020603050405020304" pitchFamily="18" charset="0"/>
               </a:rPr>
-              <a:t>Project </a:t>
-            </a:r>
-            <a:r>
-              <a:rPr lang="en-US" sz="3200" b="1" kern="100" dirty="0" err="1">
-                <a:effectLst/>
-                <a:latin typeface="Verdana" panose="020B0604030504040204" pitchFamily="34" charset="0"/>
-                <a:ea typeface="Times New Roman" panose="02020603050405020304" pitchFamily="18" charset="0"/>
-                <a:cs typeface="Times New Roman" panose="02020603050405020304" pitchFamily="18" charset="0"/>
-              </a:rPr>
-              <a:t>Usecases</a:t>
-            </a:r>
-            <a:r>
-              <a:rPr lang="en-US" sz="3200" b="1" kern="100" dirty="0">
-                <a:effectLst/>
-                <a:latin typeface="Verdana" panose="020B0604030504040204" pitchFamily="34" charset="0"/>
-                <a:ea typeface="Times New Roman" panose="02020603050405020304" pitchFamily="18" charset="0"/>
-                <a:cs typeface="Times New Roman" panose="02020603050405020304" pitchFamily="18" charset="0"/>
-              </a:rPr>
-              <a:t> &amp; Scope</a:t>
+              <a:t>Project Use cases &amp; Scope</a:t>
             </a:r>
             <a:endParaRPr lang="en-IN" sz="3200" b="1" dirty="0">
               <a:solidFill>
@@ -6665,7 +8153,7 @@
           <p:nvPr/>
         </p:nvPicPr>
         <p:blipFill>
-          <a:blip r:embed="rId4" cstate="print">
+          <a:blip r:embed="rId3" cstate="print">
             <a:extLst>
               <a:ext uri="{28A0092B-C50C-407E-A947-70E740481C1C}">
                 <a14:useLocalDpi xmlns:a14="http://schemas.microsoft.com/office/drawing/2010/main" val="0"/>
@@ -6688,10 +8176,10 @@
       </p:pic>
       <p:sp>
         <p:nvSpPr>
-          <p:cNvPr id="6" name="TextBox 5">
+          <p:cNvPr id="10" name="TextBox 9">
             <a:extLst>
               <a:ext uri="{FF2B5EF4-FFF2-40B4-BE49-F238E27FC236}">
-                <a16:creationId xmlns="" xmlns:a16="http://schemas.microsoft.com/office/drawing/2014/main" id="{AE24D516-77C6-C96A-5F77-D099623448D8}"/>
+                <a16:creationId xmlns:a16="http://schemas.microsoft.com/office/drawing/2014/main" id="{1DF51E82-67B3-C722-B9D5-3C292AB52C1A}"/>
               </a:ext>
             </a:extLst>
           </p:cNvPr>
@@ -6700,8 +8188,8 @@
         </p:nvSpPr>
         <p:spPr>
           <a:xfrm>
-            <a:off x="179512" y="1293834"/>
-            <a:ext cx="8784976" cy="372794"/>
+            <a:off x="251521" y="1838725"/>
+            <a:ext cx="4176464" cy="4524315"/>
           </a:xfrm>
           <a:prstGeom prst="rect">
             <a:avLst/>
@@ -6709,40 +8197,197 @@
           <a:noFill/>
         </p:spPr>
         <p:txBody>
+          <a:bodyPr wrap="square" rtlCol="0">
+            <a:spAutoFit/>
+          </a:bodyPr>
+          <a:lstStyle/>
+          <a:p>
+            <a:pPr algn="just"/>
+            <a:r>
+              <a:rPr lang="en-US" b="1" dirty="0">
+                <a:latin typeface="Verdana" panose="020B0604030504040204" pitchFamily="34" charset="0"/>
+                <a:ea typeface="Verdana" panose="020B0604030504040204" pitchFamily="34" charset="0"/>
+              </a:rPr>
+              <a:t>Primary Use cases:</a:t>
+            </a:r>
+          </a:p>
+          <a:p>
+            <a:pPr algn="just"/>
+            <a:endParaRPr lang="en-US" dirty="0">
+              <a:latin typeface="Verdana" panose="020B0604030504040204" pitchFamily="34" charset="0"/>
+              <a:ea typeface="Verdana" panose="020B0604030504040204" pitchFamily="34" charset="0"/>
+            </a:endParaRPr>
+          </a:p>
+          <a:p>
+            <a:pPr algn="just"/>
+            <a:r>
+              <a:rPr lang="en-US" b="1" dirty="0">
+                <a:latin typeface="Verdana" panose="020B0604030504040204" pitchFamily="34" charset="0"/>
+                <a:ea typeface="Verdana" panose="020B0604030504040204" pitchFamily="34" charset="0"/>
+              </a:rPr>
+              <a:t>Semester Planning:</a:t>
+            </a:r>
+          </a:p>
+          <a:p>
+            <a:pPr algn="just"/>
+            <a:r>
+              <a:rPr lang="en-US" dirty="0">
+                <a:latin typeface="Verdana" panose="020B0604030504040204" pitchFamily="34" charset="0"/>
+                <a:ea typeface="Verdana" panose="020B0604030504040204" pitchFamily="34" charset="0"/>
+              </a:rPr>
+              <a:t>Generating the master route schedule at the start of every academic session.</a:t>
+            </a:r>
+          </a:p>
+          <a:p>
+            <a:pPr algn="just"/>
+            <a:endParaRPr lang="en-US" dirty="0">
+              <a:latin typeface="Verdana" panose="020B0604030504040204" pitchFamily="34" charset="0"/>
+              <a:ea typeface="Verdana" panose="020B0604030504040204" pitchFamily="34" charset="0"/>
+            </a:endParaRPr>
+          </a:p>
+          <a:p>
+            <a:pPr algn="just"/>
+            <a:r>
+              <a:rPr lang="en-US" b="1" dirty="0">
+                <a:latin typeface="Verdana" panose="020B0604030504040204" pitchFamily="34" charset="0"/>
+                <a:ea typeface="Verdana" panose="020B0604030504040204" pitchFamily="34" charset="0"/>
+              </a:rPr>
+              <a:t>Budget Optimization:</a:t>
+            </a:r>
+          </a:p>
+          <a:p>
+            <a:pPr algn="just"/>
+            <a:r>
+              <a:rPr lang="en-US" dirty="0">
+                <a:latin typeface="Verdana" panose="020B0604030504040204" pitchFamily="34" charset="0"/>
+                <a:ea typeface="Verdana" panose="020B0604030504040204" pitchFamily="34" charset="0"/>
+              </a:rPr>
+              <a:t>Estimating and reducing fuel budgets by optimizing route kilometers.</a:t>
+            </a:r>
+          </a:p>
+          <a:p>
+            <a:pPr algn="just"/>
+            <a:endParaRPr lang="en-US" dirty="0">
+              <a:latin typeface="Verdana" panose="020B0604030504040204" pitchFamily="34" charset="0"/>
+              <a:ea typeface="Verdana" panose="020B0604030504040204" pitchFamily="34" charset="0"/>
+            </a:endParaRPr>
+          </a:p>
+          <a:p>
+            <a:pPr algn="just"/>
+            <a:r>
+              <a:rPr lang="en-US" b="1" dirty="0">
+                <a:latin typeface="Verdana" panose="020B0604030504040204" pitchFamily="34" charset="0"/>
+                <a:ea typeface="Verdana" panose="020B0604030504040204" pitchFamily="34" charset="0"/>
+              </a:rPr>
+              <a:t>Feasibility Testing:</a:t>
+            </a:r>
+          </a:p>
+          <a:p>
+            <a:pPr algn="just"/>
+            <a:r>
+              <a:rPr lang="en-US" dirty="0">
+                <a:latin typeface="Verdana" panose="020B0604030504040204" pitchFamily="34" charset="0"/>
+                <a:ea typeface="Verdana" panose="020B0604030504040204" pitchFamily="34" charset="0"/>
+              </a:rPr>
+              <a:t>Checking if new routes to distant towns (e.g., Rewari) are viable within time limits.</a:t>
+            </a:r>
+          </a:p>
+        </p:txBody>
+      </p:sp>
+      <p:sp>
+        <p:nvSpPr>
+          <p:cNvPr id="13" name="TextBox 12">
+            <a:extLst>
+              <a:ext uri="{FF2B5EF4-FFF2-40B4-BE49-F238E27FC236}">
+                <a16:creationId xmlns:a16="http://schemas.microsoft.com/office/drawing/2014/main" id="{91B47245-5C2C-523B-2677-E059C6B519A1}"/>
+              </a:ext>
+            </a:extLst>
+          </p:cNvPr>
+          <p:cNvSpPr txBox="1"/>
+          <p:nvPr/>
+        </p:nvSpPr>
+        <p:spPr>
+          <a:xfrm>
+            <a:off x="4716017" y="1838725"/>
+            <a:ext cx="4176464" cy="3416320"/>
+          </a:xfrm>
+          <a:prstGeom prst="rect">
+            <a:avLst/>
+          </a:prstGeom>
+          <a:noFill/>
+        </p:spPr>
+        <p:txBody>
           <a:bodyPr wrap="square">
             <a:spAutoFit/>
           </a:bodyPr>
           <a:lstStyle/>
           <a:p>
-            <a:pPr marL="0" marR="0" algn="just" fontAlgn="base">
-              <a:lnSpc>
-                <a:spcPct val="107000"/>
-              </a:lnSpc>
-              <a:spcBef>
-                <a:spcPts val="0"/>
-              </a:spcBef>
-              <a:spcAft>
-                <a:spcPts val="0"/>
-              </a:spcAft>
+            <a:pPr algn="just">
+              <a:buNone/>
             </a:pPr>
             <a:r>
-              <a:rPr lang="en-US" sz="1800" kern="100" dirty="0">
-                <a:solidFill>
-                  <a:srgbClr val="000000"/>
-                </a:solidFill>
-                <a:effectLst/>
+              <a:rPr lang="en-US" b="1" dirty="0">
                 <a:latin typeface="Verdana" panose="020B0604030504040204" pitchFamily="34" charset="0"/>
-                <a:ea typeface="Times New Roman" panose="02020603050405020304" pitchFamily="18" charset="0"/>
-                <a:cs typeface="Times New Roman" panose="02020603050405020304" pitchFamily="18" charset="0"/>
+                <a:ea typeface="Verdana" panose="020B0604030504040204" pitchFamily="34" charset="0"/>
               </a:rPr>
-              <a:t> </a:t>
-            </a:r>
-            <a:endParaRPr lang="en-US" sz="2800" kern="100" dirty="0">
-              <a:effectLst/>
-              <a:latin typeface="+mj-lt"/>
-              <a:ea typeface="Calibri" panose="020F0502020204030204" pitchFamily="34" charset="0"/>
-              <a:cs typeface="Times New Roman" panose="02020603050405020304" pitchFamily="18" charset="0"/>
+              <a:t>Scope:</a:t>
+            </a:r>
+          </a:p>
+          <a:p>
+            <a:pPr algn="just">
+              <a:buNone/>
+            </a:pPr>
+            <a:endParaRPr lang="en-US" dirty="0">
+              <a:latin typeface="Verdana" panose="020B0604030504040204" pitchFamily="34" charset="0"/>
+              <a:ea typeface="Verdana" panose="020B0604030504040204" pitchFamily="34" charset="0"/>
             </a:endParaRPr>
+          </a:p>
+          <a:p>
+            <a:pPr algn="just"/>
+            <a:r>
+              <a:rPr lang="en-US" b="1" dirty="0">
+                <a:latin typeface="Verdana" panose="020B0604030504040204" pitchFamily="34" charset="0"/>
+                <a:ea typeface="Verdana" panose="020B0604030504040204" pitchFamily="34" charset="0"/>
+              </a:rPr>
+              <a:t>Geographic:</a:t>
+            </a:r>
+          </a:p>
+          <a:p>
+            <a:pPr algn="just"/>
+            <a:r>
+              <a:rPr lang="en-US" dirty="0">
+                <a:latin typeface="Verdana" panose="020B0604030504040204" pitchFamily="34" charset="0"/>
+                <a:ea typeface="Verdana" panose="020B0604030504040204" pitchFamily="34" charset="0"/>
+              </a:rPr>
+              <a:t>Covers the entire K.R. Mangalam University catchment area (Sohna, Gurugram, Faridabad, Noida, Palwal, Bhiwadi).</a:t>
+            </a:r>
+          </a:p>
+          <a:p>
+            <a:pPr algn="just"/>
+            <a:endParaRPr lang="en-US" dirty="0">
+              <a:latin typeface="Verdana" panose="020B0604030504040204" pitchFamily="34" charset="0"/>
+              <a:ea typeface="Verdana" panose="020B0604030504040204" pitchFamily="34" charset="0"/>
+            </a:endParaRPr>
+          </a:p>
+          <a:p>
+            <a:pPr algn="just"/>
+            <a:r>
+              <a:rPr lang="en-US" b="1" dirty="0">
+                <a:latin typeface="Verdana" panose="020B0604030504040204" pitchFamily="34" charset="0"/>
+                <a:ea typeface="Verdana" panose="020B0604030504040204" pitchFamily="34" charset="0"/>
+              </a:rPr>
+              <a:t>Operational:</a:t>
+            </a:r>
+          </a:p>
+          <a:p>
+            <a:pPr algn="just"/>
+            <a:r>
+              <a:rPr lang="en-US" dirty="0">
+                <a:latin typeface="Verdana" panose="020B0604030504040204" pitchFamily="34" charset="0"/>
+                <a:ea typeface="Verdana" panose="020B0604030504040204" pitchFamily="34" charset="0"/>
+              </a:rPr>
+              <a:t>Focuses on static planning and fleet scheduling (Does not include real-time GPS tracking hardware).</a:t>
+            </a:r>
           </a:p>
         </p:txBody>
       </p:sp>
@@ -6776,35 +8421,6 @@
           <a:chExt cx="0" cy="0"/>
         </a:xfrm>
       </p:grpSpPr>
-      <p:pic>
-        <p:nvPicPr>
-          <p:cNvPr id="4" name="Content Placeholder 3"/>
-          <p:cNvPicPr>
-            <a:picLocks noGrp="1" noChangeAspect="1"/>
-          </p:cNvPicPr>
-          <p:nvPr>
-            <p:ph idx="1"/>
-          </p:nvPr>
-        </p:nvPicPr>
-        <p:blipFill>
-          <a:blip r:embed="rId3" cstate="print">
-            <a:extLst>
-              <a:ext uri="{28A0092B-C50C-407E-A947-70E740481C1C}">
-                <a14:useLocalDpi xmlns:a14="http://schemas.microsoft.com/office/drawing/2010/main" val="0"/>
-              </a:ext>
-            </a:extLst>
-          </a:blip>
-          <a:stretch>
-            <a:fillRect/>
-          </a:stretch>
-        </p:blipFill>
-        <p:spPr>
-          <a:xfrm>
-            <a:off x="1" y="0"/>
-            <a:ext cx="9180512" cy="6885384"/>
-          </a:xfrm>
-        </p:spPr>
-      </p:pic>
       <p:sp>
         <p:nvSpPr>
           <p:cNvPr id="5" name="Rectangle 1"/>
@@ -6930,7 +8546,7 @@
           <p:nvPr/>
         </p:nvPicPr>
         <p:blipFill>
-          <a:blip r:embed="rId4" cstate="print">
+          <a:blip r:embed="rId3" cstate="print">
             <a:extLst>
               <a:ext uri="{28A0092B-C50C-407E-A947-70E740481C1C}">
                 <a14:useLocalDpi xmlns:a14="http://schemas.microsoft.com/office/drawing/2010/main" val="0"/>
@@ -6951,66 +8567,36 @@
           </a:prstGeom>
         </p:spPr>
       </p:pic>
-      <p:sp>
-        <p:nvSpPr>
-          <p:cNvPr id="6" name="TextBox 5">
+      <p:pic>
+        <p:nvPicPr>
+          <p:cNvPr id="10" name="Picture 9">
             <a:extLst>
               <a:ext uri="{FF2B5EF4-FFF2-40B4-BE49-F238E27FC236}">
-                <a16:creationId xmlns="" xmlns:a16="http://schemas.microsoft.com/office/drawing/2014/main" id="{AE24D516-77C6-C96A-5F77-D099623448D8}"/>
+                <a16:creationId xmlns:a16="http://schemas.microsoft.com/office/drawing/2014/main" id="{897E7D47-3EFA-459D-BC1E-94A447320279}"/>
               </a:ext>
             </a:extLst>
           </p:cNvPr>
-          <p:cNvSpPr txBox="1"/>
+          <p:cNvPicPr>
+            <a:picLocks noChangeAspect="1"/>
+          </p:cNvPicPr>
           <p:nvPr/>
-        </p:nvSpPr>
+        </p:nvPicPr>
+        <p:blipFill>
+          <a:blip r:embed="rId4"/>
+          <a:stretch>
+            <a:fillRect/>
+          </a:stretch>
+        </p:blipFill>
         <p:spPr>
           <a:xfrm>
-            <a:off x="179512" y="1293834"/>
-            <a:ext cx="8784976" cy="372794"/>
+            <a:off x="389583" y="1932637"/>
+            <a:ext cx="8364834" cy="3708793"/>
           </a:xfrm>
           <a:prstGeom prst="rect">
             <a:avLst/>
           </a:prstGeom>
-          <a:noFill/>
         </p:spPr>
-        <p:txBody>
-          <a:bodyPr wrap="square">
-            <a:spAutoFit/>
-          </a:bodyPr>
-          <a:lstStyle/>
-          <a:p>
-            <a:pPr marL="0" marR="0" algn="just" fontAlgn="base">
-              <a:lnSpc>
-                <a:spcPct val="107000"/>
-              </a:lnSpc>
-              <a:spcBef>
-                <a:spcPts val="0"/>
-              </a:spcBef>
-              <a:spcAft>
-                <a:spcPts val="0"/>
-              </a:spcAft>
-            </a:pPr>
-            <a:r>
-              <a:rPr lang="en-US" sz="1800" kern="100" dirty="0">
-                <a:solidFill>
-                  <a:srgbClr val="000000"/>
-                </a:solidFill>
-                <a:effectLst/>
-                <a:latin typeface="Verdana" panose="020B0604030504040204" pitchFamily="34" charset="0"/>
-                <a:ea typeface="Times New Roman" panose="02020603050405020304" pitchFamily="18" charset="0"/>
-                <a:cs typeface="Times New Roman" panose="02020603050405020304" pitchFamily="18" charset="0"/>
-              </a:rPr>
-              <a:t> </a:t>
-            </a:r>
-            <a:endParaRPr lang="en-US" sz="2800" kern="100" dirty="0">
-              <a:effectLst/>
-              <a:latin typeface="+mj-lt"/>
-              <a:ea typeface="Calibri" panose="020F0502020204030204" pitchFamily="34" charset="0"/>
-              <a:cs typeface="Times New Roman" panose="02020603050405020304" pitchFamily="18" charset="0"/>
-            </a:endParaRPr>
-          </a:p>
-        </p:txBody>
-      </p:sp>
+      </p:pic>
     </p:spTree>
     <p:extLst>
       <p:ext uri="{BB962C8B-B14F-4D97-AF65-F5344CB8AC3E}">
@@ -7041,35 +8627,6 @@
           <a:chExt cx="0" cy="0"/>
         </a:xfrm>
       </p:grpSpPr>
-      <p:pic>
-        <p:nvPicPr>
-          <p:cNvPr id="4" name="Content Placeholder 3"/>
-          <p:cNvPicPr>
-            <a:picLocks noGrp="1" noChangeAspect="1"/>
-          </p:cNvPicPr>
-          <p:nvPr>
-            <p:ph idx="1"/>
-          </p:nvPr>
-        </p:nvPicPr>
-        <p:blipFill>
-          <a:blip r:embed="rId3" cstate="print">
-            <a:extLst>
-              <a:ext uri="{28A0092B-C50C-407E-A947-70E740481C1C}">
-                <a14:useLocalDpi xmlns:a14="http://schemas.microsoft.com/office/drawing/2010/main" val="0"/>
-              </a:ext>
-            </a:extLst>
-          </a:blip>
-          <a:stretch>
-            <a:fillRect/>
-          </a:stretch>
-        </p:blipFill>
-        <p:spPr>
-          <a:xfrm>
-            <a:off x="1" y="0"/>
-            <a:ext cx="9180512" cy="6885384"/>
-          </a:xfrm>
-        </p:spPr>
-      </p:pic>
       <p:sp>
         <p:nvSpPr>
           <p:cNvPr id="5" name="Rectangle 1"/>
@@ -7195,7 +8752,7 @@
           <p:nvPr/>
         </p:nvPicPr>
         <p:blipFill>
-          <a:blip r:embed="rId4" cstate="print">
+          <a:blip r:embed="rId3" cstate="print">
             <a:extLst>
               <a:ext uri="{28A0092B-C50C-407E-A947-70E740481C1C}">
                 <a14:useLocalDpi xmlns:a14="http://schemas.microsoft.com/office/drawing/2010/main" val="0"/>
@@ -7218,121 +8775,593 @@
       </p:pic>
       <p:sp>
         <p:nvSpPr>
-          <p:cNvPr id="6" name="TextBox 5">
+          <p:cNvPr id="11" name="Rectangle 2">
             <a:extLst>
               <a:ext uri="{FF2B5EF4-FFF2-40B4-BE49-F238E27FC236}">
-                <a16:creationId xmlns="" xmlns:a16="http://schemas.microsoft.com/office/drawing/2014/main" id="{AE24D516-77C6-C96A-5F77-D099623448D8}"/>
+                <a16:creationId xmlns:a16="http://schemas.microsoft.com/office/drawing/2014/main" id="{22328010-B45A-B3D1-0442-596DA766964D}"/>
               </a:ext>
             </a:extLst>
           </p:cNvPr>
-          <p:cNvSpPr txBox="1"/>
-          <p:nvPr/>
-        </p:nvSpPr>
-        <p:spPr>
+          <p:cNvSpPr>
+            <a:spLocks noGrp="1" noChangeArrowheads="1"/>
+          </p:cNvSpPr>
+          <p:nvPr>
+            <p:ph idx="1"/>
+          </p:nvPr>
+        </p:nvSpPr>
+        <p:spPr bwMode="auto">
           <a:xfrm>
-            <a:off x="179512" y="1293834"/>
-            <a:ext cx="8784976" cy="372794"/>
+            <a:off x="462372" y="1561726"/>
+            <a:ext cx="8219256" cy="4247317"/>
           </a:xfrm>
           <a:prstGeom prst="rect">
             <a:avLst/>
           </a:prstGeom>
           <a:noFill/>
+          <a:ln>
+            <a:noFill/>
+          </a:ln>
+          <a:effectLst/>
+          <a:extLst>
+            <a:ext uri="{909E8E84-426E-40DD-AFC4-6F175D3DCCD1}">
+              <a14:hiddenFill xmlns:a14="http://schemas.microsoft.com/office/drawing/2010/main">
+                <a:solidFill>
+                  <a:schemeClr val="accent1"/>
+                </a:solidFill>
+              </a14:hiddenFill>
+            </a:ext>
+            <a:ext uri="{91240B29-F687-4F45-9708-019B960494DF}">
+              <a14:hiddenLine xmlns:a14="http://schemas.microsoft.com/office/drawing/2010/main" w="9525">
+                <a:solidFill>
+                  <a:schemeClr val="tx1"/>
+                </a:solidFill>
+                <a:miter lim="800000"/>
+                <a:headEnd/>
+                <a:tailEnd/>
+              </a14:hiddenLine>
+            </a:ext>
+            <a:ext uri="{AF507438-7753-43E0-B8FC-AC1667EBCBE1}">
+              <a14:hiddenEffects xmlns:a14="http://schemas.microsoft.com/office/drawing/2010/main">
+                <a:effectLst>
+                  <a:outerShdw dist="35921" dir="2700000" algn="ctr" rotWithShape="0">
+                    <a:schemeClr val="bg2"/>
+                  </a:outerShdw>
+                </a:effectLst>
+              </a14:hiddenEffects>
+            </a:ext>
+          </a:extLst>
         </p:spPr>
         <p:txBody>
-          <a:bodyPr wrap="square">
+          <a:bodyPr vert="horz" wrap="square" lIns="91440" tIns="45720" rIns="91440" bIns="45720" numCol="1" anchor="ctr" anchorCtr="0" compatLnSpc="1">
+            <a:prstTxWarp prst="textNoShape">
+              <a:avLst/>
+            </a:prstTxWarp>
             <a:spAutoFit/>
           </a:bodyPr>
           <a:lstStyle/>
           <a:p>
-            <a:pPr marL="0" marR="0" algn="just" fontAlgn="base">
+            <a:pPr marL="0" marR="0" lvl="0" indent="0" algn="l" defTabSz="914400" rtl="0" eaLnBrk="0" fontAlgn="base" latinLnBrk="0" hangingPunct="0">
               <a:lnSpc>
-                <a:spcPct val="107000"/>
+                <a:spcPct val="100000"/>
               </a:lnSpc>
               <a:spcBef>
-                <a:spcPts val="0"/>
+                <a:spcPct val="0"/>
               </a:spcBef>
               <a:spcAft>
-                <a:spcPts val="0"/>
+                <a:spcPct val="0"/>
               </a:spcAft>
+              <a:buClrTx/>
+              <a:buSzTx/>
+              <a:buNone/>
+              <a:tabLst/>
             </a:pPr>
             <a:r>
-              <a:rPr lang="en-US" sz="1800" kern="100" dirty="0">
-                <a:solidFill>
-                  <a:srgbClr val="000000"/>
+              <a:rPr kumimoji="0" lang="en-US" altLang="en-US" sz="1800" b="1" i="0" u="none" strike="noStrike" cap="none" normalizeH="0" baseline="0" dirty="0">
+                <a:ln>
+                  <a:noFill/>
+                </a:ln>
+                <a:solidFill>
+                  <a:schemeClr val="tx1"/>
                 </a:solidFill>
                 <a:effectLst/>
                 <a:latin typeface="Verdana" panose="020B0604030504040204" pitchFamily="34" charset="0"/>
-                <a:ea typeface="Times New Roman" panose="02020603050405020304" pitchFamily="18" charset="0"/>
-                <a:cs typeface="Times New Roman" panose="02020603050405020304" pitchFamily="18" charset="0"/>
+                <a:ea typeface="Verdana" panose="020B0604030504040204" pitchFamily="34" charset="0"/>
               </a:rPr>
-              <a:t> </a:t>
-            </a:r>
-            <a:endParaRPr lang="en-US" sz="2800" kern="100" dirty="0">
+              <a:t>Data Sources</a:t>
+            </a:r>
+            <a:endParaRPr kumimoji="0" lang="en-US" altLang="en-US" sz="1800" b="0" i="0" u="none" strike="noStrike" cap="none" normalizeH="0" baseline="0" dirty="0">
+              <a:ln>
+                <a:noFill/>
+              </a:ln>
+              <a:solidFill>
+                <a:schemeClr val="tx1"/>
+              </a:solidFill>
               <a:effectLst/>
-              <a:latin typeface="+mj-lt"/>
-              <a:ea typeface="Calibri" panose="020F0502020204030204" pitchFamily="34" charset="0"/>
-              <a:cs typeface="Times New Roman" panose="02020603050405020304" pitchFamily="18" charset="0"/>
+              <a:latin typeface="Verdana" panose="020B0604030504040204" pitchFamily="34" charset="0"/>
+              <a:ea typeface="Verdana" panose="020B0604030504040204" pitchFamily="34" charset="0"/>
             </a:endParaRPr>
           </a:p>
-        </p:txBody>
-      </p:sp>
-      <p:sp>
-        <p:nvSpPr>
-          <p:cNvPr id="3" name="TextBox 2">
-            <a:extLst>
-              <a:ext uri="{FF2B5EF4-FFF2-40B4-BE49-F238E27FC236}">
-                <a16:creationId xmlns="" xmlns:a16="http://schemas.microsoft.com/office/drawing/2014/main" id="{C67A919E-7DB1-E6B8-D950-8901A88C816D}"/>
-              </a:ext>
-            </a:extLst>
-          </p:cNvPr>
-          <p:cNvSpPr txBox="1"/>
-          <p:nvPr/>
-        </p:nvSpPr>
-        <p:spPr>
-          <a:xfrm>
-            <a:off x="395536" y="1772816"/>
-            <a:ext cx="7344816" cy="646331"/>
-          </a:xfrm>
-          <a:prstGeom prst="rect">
-            <a:avLst/>
-          </a:prstGeom>
-          <a:noFill/>
-        </p:spPr>
-        <p:txBody>
-          <a:bodyPr wrap="square">
-            <a:spAutoFit/>
-          </a:bodyPr>
-          <a:lstStyle/>
-          <a:p>
-            <a:pPr algn="l">
-              <a:buFont typeface="Arial" panose="020B0604020202020204" pitchFamily="34" charset="0"/>
-              <a:buChar char="•"/>
+          <a:p>
+            <a:pPr marL="0" marR="0" lvl="0" indent="0" algn="l" defTabSz="914400" rtl="0" eaLnBrk="0" fontAlgn="base" latinLnBrk="0" hangingPunct="0">
+              <a:lnSpc>
+                <a:spcPct val="100000"/>
+              </a:lnSpc>
+              <a:spcBef>
+                <a:spcPct val="0"/>
+              </a:spcBef>
+              <a:spcAft>
+                <a:spcPct val="0"/>
+              </a:spcAft>
+              <a:buClrTx/>
+              <a:buSzTx/>
+              <a:buNone/>
+              <a:tabLst/>
             </a:pPr>
             <a:r>
-              <a:rPr lang="en-US" b="0" i="0" dirty="0">
-                <a:solidFill>
-                  <a:srgbClr val="374151"/>
+              <a:rPr kumimoji="0" lang="en-US" altLang="en-US" sz="1800" b="1" i="0" u="none" strike="noStrike" cap="none" normalizeH="0" baseline="0" dirty="0">
+                <a:ln>
+                  <a:noFill/>
+                </a:ln>
+                <a:solidFill>
+                  <a:schemeClr val="tx1"/>
                 </a:solidFill>
                 <a:effectLst/>
-                <a:latin typeface="Söhne"/>
+                <a:latin typeface="Verdana" panose="020B0604030504040204" pitchFamily="34" charset="0"/>
+                <a:ea typeface="Verdana" panose="020B0604030504040204" pitchFamily="34" charset="0"/>
               </a:rPr>
-              <a:t>Describe the data sources or materials you used.</a:t>
-            </a:r>
-          </a:p>
-          <a:p>
-            <a:pPr algn="l">
-              <a:buFont typeface="Arial" panose="020B0604020202020204" pitchFamily="34" charset="0"/>
-              <a:buChar char="•"/>
+              <a:t>Map Data:</a:t>
+            </a:r>
+            <a:r>
+              <a:rPr kumimoji="0" lang="en-US" altLang="en-US" sz="1800" b="0" i="0" u="none" strike="noStrike" cap="none" normalizeH="0" baseline="0" dirty="0">
+                <a:ln>
+                  <a:noFill/>
+                </a:ln>
+                <a:solidFill>
+                  <a:schemeClr val="tx1"/>
+                </a:solidFill>
+                <a:effectLst/>
+                <a:latin typeface="Verdana" panose="020B0604030504040204" pitchFamily="34" charset="0"/>
+                <a:ea typeface="Verdana" panose="020B0604030504040204" pitchFamily="34" charset="0"/>
+              </a:rPr>
+              <a:t> OpenStreetMap (OSM) extracts for North India (via </a:t>
+            </a:r>
+            <a:r>
+              <a:rPr kumimoji="0" lang="en-US" altLang="en-US" sz="1800" b="0" i="0" u="none" strike="noStrike" cap="none" normalizeH="0" baseline="0" dirty="0" err="1">
+                <a:ln>
+                  <a:noFill/>
+                </a:ln>
+                <a:solidFill>
+                  <a:schemeClr val="tx1"/>
+                </a:solidFill>
+                <a:effectLst/>
+                <a:latin typeface="Verdana" panose="020B0604030504040204" pitchFamily="34" charset="0"/>
+                <a:ea typeface="Verdana" panose="020B0604030504040204" pitchFamily="34" charset="0"/>
+              </a:rPr>
+              <a:t>Geofabrik</a:t>
+            </a:r>
+            <a:r>
+              <a:rPr kumimoji="0" lang="en-US" altLang="en-US" sz="1800" b="0" i="0" u="none" strike="noStrike" cap="none" normalizeH="0" baseline="0" dirty="0">
+                <a:ln>
+                  <a:noFill/>
+                </a:ln>
+                <a:solidFill>
+                  <a:schemeClr val="tx1"/>
+                </a:solidFill>
+                <a:effectLst/>
+                <a:latin typeface="Verdana" panose="020B0604030504040204" pitchFamily="34" charset="0"/>
+                <a:ea typeface="Verdana" panose="020B0604030504040204" pitchFamily="34" charset="0"/>
+              </a:rPr>
+              <a:t>).</a:t>
+            </a:r>
+          </a:p>
+          <a:p>
+            <a:pPr marL="0" marR="0" lvl="0" indent="0" algn="l" defTabSz="914400" rtl="0" eaLnBrk="0" fontAlgn="base" latinLnBrk="0" hangingPunct="0">
+              <a:lnSpc>
+                <a:spcPct val="100000"/>
+              </a:lnSpc>
+              <a:spcBef>
+                <a:spcPct val="0"/>
+              </a:spcBef>
+              <a:spcAft>
+                <a:spcPct val="0"/>
+              </a:spcAft>
+              <a:buClrTx/>
+              <a:buSzTx/>
+              <a:buNone/>
+              <a:tabLst/>
             </a:pPr>
             <a:r>
-              <a:rPr lang="en-US" b="0" i="0" dirty="0">
-                <a:solidFill>
-                  <a:srgbClr val="374151"/>
+              <a:rPr kumimoji="0" lang="en-US" altLang="en-US" sz="1800" b="1" i="0" u="none" strike="noStrike" cap="none" normalizeH="0" baseline="0" dirty="0">
+                <a:ln>
+                  <a:noFill/>
+                </a:ln>
+                <a:solidFill>
+                  <a:schemeClr val="tx1"/>
                 </a:solidFill>
                 <a:effectLst/>
-                <a:latin typeface="Söhne"/>
+                <a:latin typeface="Verdana" panose="020B0604030504040204" pitchFamily="34" charset="0"/>
+                <a:ea typeface="Verdana" panose="020B0604030504040204" pitchFamily="34" charset="0"/>
               </a:rPr>
-              <a:t>Highlight any databases, software, or hardware.</a:t>
+              <a:t>Stop Data:</a:t>
+            </a:r>
+            <a:r>
+              <a:rPr kumimoji="0" lang="en-US" altLang="en-US" sz="1800" b="0" i="0" u="none" strike="noStrike" cap="none" normalizeH="0" baseline="0" dirty="0">
+                <a:ln>
+                  <a:noFill/>
+                </a:ln>
+                <a:solidFill>
+                  <a:schemeClr val="tx1"/>
+                </a:solidFill>
+                <a:effectLst/>
+                <a:latin typeface="Verdana" panose="020B0604030504040204" pitchFamily="34" charset="0"/>
+                <a:ea typeface="Verdana" panose="020B0604030504040204" pitchFamily="34" charset="0"/>
+              </a:rPr>
+              <a:t> Geotagged coordinates for student pickup points across Palwal, Faridabad, Noida, etc.</a:t>
+            </a:r>
+          </a:p>
+          <a:p>
+            <a:pPr marL="0" marR="0" lvl="0" indent="0" algn="l" defTabSz="914400" rtl="0" eaLnBrk="0" fontAlgn="base" latinLnBrk="0" hangingPunct="0">
+              <a:lnSpc>
+                <a:spcPct val="100000"/>
+              </a:lnSpc>
+              <a:spcBef>
+                <a:spcPct val="0"/>
+              </a:spcBef>
+              <a:spcAft>
+                <a:spcPct val="0"/>
+              </a:spcAft>
+              <a:buClrTx/>
+              <a:buSzTx/>
+              <a:buNone/>
+              <a:tabLst/>
+            </a:pPr>
+            <a:endParaRPr kumimoji="0" lang="en-US" altLang="en-US" sz="1800" b="0" i="0" u="none" strike="noStrike" cap="none" normalizeH="0" baseline="0" dirty="0">
+              <a:ln>
+                <a:noFill/>
+              </a:ln>
+              <a:solidFill>
+                <a:schemeClr val="tx1"/>
+              </a:solidFill>
+              <a:effectLst/>
+              <a:latin typeface="Verdana" panose="020B0604030504040204" pitchFamily="34" charset="0"/>
+              <a:ea typeface="Verdana" panose="020B0604030504040204" pitchFamily="34" charset="0"/>
+            </a:endParaRPr>
+          </a:p>
+          <a:p>
+            <a:pPr marL="0" marR="0" lvl="0" indent="0" algn="l" defTabSz="914400" rtl="0" eaLnBrk="0" fontAlgn="base" latinLnBrk="0" hangingPunct="0">
+              <a:lnSpc>
+                <a:spcPct val="100000"/>
+              </a:lnSpc>
+              <a:spcBef>
+                <a:spcPct val="0"/>
+              </a:spcBef>
+              <a:spcAft>
+                <a:spcPct val="0"/>
+              </a:spcAft>
+              <a:buClrTx/>
+              <a:buSzTx/>
+              <a:buNone/>
+              <a:tabLst/>
+            </a:pPr>
+            <a:r>
+              <a:rPr kumimoji="0" lang="en-US" altLang="en-US" sz="1800" b="1" i="0" u="none" strike="noStrike" cap="none" normalizeH="0" baseline="0" dirty="0">
+                <a:ln>
+                  <a:noFill/>
+                </a:ln>
+                <a:solidFill>
+                  <a:schemeClr val="tx1"/>
+                </a:solidFill>
+                <a:effectLst/>
+                <a:latin typeface="Verdana" panose="020B0604030504040204" pitchFamily="34" charset="0"/>
+                <a:ea typeface="Verdana" panose="020B0604030504040204" pitchFamily="34" charset="0"/>
+              </a:rPr>
+              <a:t>Software &amp; Frameworks</a:t>
+            </a:r>
+            <a:endParaRPr kumimoji="0" lang="en-US" altLang="en-US" sz="1800" b="0" i="0" u="none" strike="noStrike" cap="none" normalizeH="0" baseline="0" dirty="0">
+              <a:ln>
+                <a:noFill/>
+              </a:ln>
+              <a:solidFill>
+                <a:schemeClr val="tx1"/>
+              </a:solidFill>
+              <a:effectLst/>
+              <a:latin typeface="Verdana" panose="020B0604030504040204" pitchFamily="34" charset="0"/>
+              <a:ea typeface="Verdana" panose="020B0604030504040204" pitchFamily="34" charset="0"/>
+            </a:endParaRPr>
+          </a:p>
+          <a:p>
+            <a:pPr marL="0" marR="0" lvl="0" indent="0" algn="l" defTabSz="914400" rtl="0" eaLnBrk="0" fontAlgn="base" latinLnBrk="0" hangingPunct="0">
+              <a:lnSpc>
+                <a:spcPct val="100000"/>
+              </a:lnSpc>
+              <a:spcBef>
+                <a:spcPct val="0"/>
+              </a:spcBef>
+              <a:spcAft>
+                <a:spcPct val="0"/>
+              </a:spcAft>
+              <a:buClrTx/>
+              <a:buSzTx/>
+              <a:buNone/>
+              <a:tabLst/>
+            </a:pPr>
+            <a:r>
+              <a:rPr kumimoji="0" lang="en-US" altLang="en-US" sz="1800" b="1" i="0" u="none" strike="noStrike" cap="none" normalizeH="0" baseline="0" dirty="0">
+                <a:ln>
+                  <a:noFill/>
+                </a:ln>
+                <a:solidFill>
+                  <a:schemeClr val="tx1"/>
+                </a:solidFill>
+                <a:effectLst/>
+                <a:latin typeface="Verdana" panose="020B0604030504040204" pitchFamily="34" charset="0"/>
+                <a:ea typeface="Verdana" panose="020B0604030504040204" pitchFamily="34" charset="0"/>
+              </a:rPr>
+              <a:t>Frontend:</a:t>
+            </a:r>
+            <a:r>
+              <a:rPr kumimoji="0" lang="en-US" altLang="en-US" sz="1800" b="0" i="0" u="none" strike="noStrike" cap="none" normalizeH="0" baseline="0" dirty="0">
+                <a:ln>
+                  <a:noFill/>
+                </a:ln>
+                <a:solidFill>
+                  <a:schemeClr val="tx1"/>
+                </a:solidFill>
+                <a:effectLst/>
+                <a:latin typeface="Verdana" panose="020B0604030504040204" pitchFamily="34" charset="0"/>
+                <a:ea typeface="Verdana" panose="020B0604030504040204" pitchFamily="34" charset="0"/>
+              </a:rPr>
+              <a:t> Next.js (React), Leaflet.js, </a:t>
+            </a:r>
+            <a:r>
+              <a:rPr kumimoji="0" lang="en-US" altLang="en-US" sz="1800" b="0" i="0" u="none" strike="noStrike" cap="none" normalizeH="0" baseline="0" dirty="0" err="1">
+                <a:ln>
+                  <a:noFill/>
+                </a:ln>
+                <a:solidFill>
+                  <a:schemeClr val="tx1"/>
+                </a:solidFill>
+                <a:effectLst/>
+                <a:latin typeface="Verdana" panose="020B0604030504040204" pitchFamily="34" charset="0"/>
+                <a:ea typeface="Verdana" panose="020B0604030504040204" pitchFamily="34" charset="0"/>
+              </a:rPr>
+              <a:t>TanStack</a:t>
+            </a:r>
+            <a:r>
+              <a:rPr kumimoji="0" lang="en-US" altLang="en-US" sz="1800" b="0" i="0" u="none" strike="noStrike" cap="none" normalizeH="0" baseline="0" dirty="0">
+                <a:ln>
+                  <a:noFill/>
+                </a:ln>
+                <a:solidFill>
+                  <a:schemeClr val="tx1"/>
+                </a:solidFill>
+                <a:effectLst/>
+                <a:latin typeface="Verdana" panose="020B0604030504040204" pitchFamily="34" charset="0"/>
+                <a:ea typeface="Verdana" panose="020B0604030504040204" pitchFamily="34" charset="0"/>
+              </a:rPr>
+              <a:t> Query.</a:t>
+            </a:r>
+          </a:p>
+          <a:p>
+            <a:pPr marL="0" marR="0" lvl="0" indent="0" algn="l" defTabSz="914400" rtl="0" eaLnBrk="0" fontAlgn="base" latinLnBrk="0" hangingPunct="0">
+              <a:lnSpc>
+                <a:spcPct val="100000"/>
+              </a:lnSpc>
+              <a:spcBef>
+                <a:spcPct val="0"/>
+              </a:spcBef>
+              <a:spcAft>
+                <a:spcPct val="0"/>
+              </a:spcAft>
+              <a:buClrTx/>
+              <a:buSzTx/>
+              <a:buNone/>
+              <a:tabLst/>
+            </a:pPr>
+            <a:r>
+              <a:rPr kumimoji="0" lang="en-US" altLang="en-US" sz="1800" b="1" i="0" u="none" strike="noStrike" cap="none" normalizeH="0" baseline="0" dirty="0">
+                <a:ln>
+                  <a:noFill/>
+                </a:ln>
+                <a:solidFill>
+                  <a:schemeClr val="tx1"/>
+                </a:solidFill>
+                <a:effectLst/>
+                <a:latin typeface="Verdana" panose="020B0604030504040204" pitchFamily="34" charset="0"/>
+                <a:ea typeface="Verdana" panose="020B0604030504040204" pitchFamily="34" charset="0"/>
+              </a:rPr>
+              <a:t>Backend:</a:t>
+            </a:r>
+            <a:r>
+              <a:rPr kumimoji="0" lang="en-US" altLang="en-US" sz="1800" b="0" i="0" u="none" strike="noStrike" cap="none" normalizeH="0" baseline="0" dirty="0">
+                <a:ln>
+                  <a:noFill/>
+                </a:ln>
+                <a:solidFill>
+                  <a:schemeClr val="tx1"/>
+                </a:solidFill>
+                <a:effectLst/>
+                <a:latin typeface="Verdana" panose="020B0604030504040204" pitchFamily="34" charset="0"/>
+                <a:ea typeface="Verdana" panose="020B0604030504040204" pitchFamily="34" charset="0"/>
+              </a:rPr>
+              <a:t> Python, FastAPI, Pandas.</a:t>
+            </a:r>
+          </a:p>
+          <a:p>
+            <a:pPr marL="0" marR="0" lvl="0" indent="0" algn="l" defTabSz="914400" rtl="0" eaLnBrk="0" fontAlgn="base" latinLnBrk="0" hangingPunct="0">
+              <a:lnSpc>
+                <a:spcPct val="100000"/>
+              </a:lnSpc>
+              <a:spcBef>
+                <a:spcPct val="0"/>
+              </a:spcBef>
+              <a:spcAft>
+                <a:spcPct val="0"/>
+              </a:spcAft>
+              <a:buClrTx/>
+              <a:buSzTx/>
+              <a:buNone/>
+              <a:tabLst/>
+            </a:pPr>
+            <a:r>
+              <a:rPr kumimoji="0" lang="en-US" altLang="en-US" sz="1800" b="1" i="0" u="none" strike="noStrike" cap="none" normalizeH="0" baseline="0" dirty="0">
+                <a:ln>
+                  <a:noFill/>
+                </a:ln>
+                <a:solidFill>
+                  <a:schemeClr val="tx1"/>
+                </a:solidFill>
+                <a:effectLst/>
+                <a:latin typeface="Verdana" panose="020B0604030504040204" pitchFamily="34" charset="0"/>
+                <a:ea typeface="Verdana" panose="020B0604030504040204" pitchFamily="34" charset="0"/>
+              </a:rPr>
+              <a:t>Optimization:</a:t>
+            </a:r>
+            <a:r>
+              <a:rPr kumimoji="0" lang="en-US" altLang="en-US" sz="1800" b="0" i="0" u="none" strike="noStrike" cap="none" normalizeH="0" baseline="0" dirty="0">
+                <a:ln>
+                  <a:noFill/>
+                </a:ln>
+                <a:solidFill>
+                  <a:schemeClr val="tx1"/>
+                </a:solidFill>
+                <a:effectLst/>
+                <a:latin typeface="Verdana" panose="020B0604030504040204" pitchFamily="34" charset="0"/>
+                <a:ea typeface="Verdana" panose="020B0604030504040204" pitchFamily="34" charset="0"/>
+              </a:rPr>
+              <a:t> Google OR-Tools, OSRM (Open Source Routing Machine).</a:t>
+            </a:r>
+          </a:p>
+          <a:p>
+            <a:pPr marL="0" marR="0" lvl="0" indent="0" algn="l" defTabSz="914400" rtl="0" eaLnBrk="0" fontAlgn="base" latinLnBrk="0" hangingPunct="0">
+              <a:lnSpc>
+                <a:spcPct val="100000"/>
+              </a:lnSpc>
+              <a:spcBef>
+                <a:spcPct val="0"/>
+              </a:spcBef>
+              <a:spcAft>
+                <a:spcPct val="0"/>
+              </a:spcAft>
+              <a:buClrTx/>
+              <a:buSzTx/>
+              <a:buNone/>
+              <a:tabLst/>
+            </a:pPr>
+            <a:endParaRPr kumimoji="0" lang="en-US" altLang="en-US" sz="1800" b="1" i="0" u="none" strike="noStrike" cap="none" normalizeH="0" baseline="0" dirty="0">
+              <a:ln>
+                <a:noFill/>
+              </a:ln>
+              <a:solidFill>
+                <a:schemeClr val="tx1"/>
+              </a:solidFill>
+              <a:effectLst/>
+              <a:latin typeface="Verdana" panose="020B0604030504040204" pitchFamily="34" charset="0"/>
+              <a:ea typeface="Verdana" panose="020B0604030504040204" pitchFamily="34" charset="0"/>
+            </a:endParaRPr>
+          </a:p>
+          <a:p>
+            <a:pPr marL="0" marR="0" lvl="0" indent="0" algn="l" defTabSz="914400" rtl="0" eaLnBrk="0" fontAlgn="base" latinLnBrk="0" hangingPunct="0">
+              <a:lnSpc>
+                <a:spcPct val="100000"/>
+              </a:lnSpc>
+              <a:spcBef>
+                <a:spcPct val="0"/>
+              </a:spcBef>
+              <a:spcAft>
+                <a:spcPct val="0"/>
+              </a:spcAft>
+              <a:buClrTx/>
+              <a:buSzTx/>
+              <a:buNone/>
+              <a:tabLst/>
+            </a:pPr>
+            <a:r>
+              <a:rPr kumimoji="0" lang="en-US" altLang="en-US" sz="1800" b="1" i="0" u="none" strike="noStrike" cap="none" normalizeH="0" baseline="0" dirty="0">
+                <a:ln>
+                  <a:noFill/>
+                </a:ln>
+                <a:solidFill>
+                  <a:schemeClr val="tx1"/>
+                </a:solidFill>
+                <a:effectLst/>
+                <a:latin typeface="Verdana" panose="020B0604030504040204" pitchFamily="34" charset="0"/>
+                <a:ea typeface="Verdana" panose="020B0604030504040204" pitchFamily="34" charset="0"/>
+              </a:rPr>
+              <a:t>Hardware</a:t>
+            </a:r>
+            <a:endParaRPr kumimoji="0" lang="en-US" altLang="en-US" sz="1800" b="0" i="0" u="none" strike="noStrike" cap="none" normalizeH="0" baseline="0" dirty="0">
+              <a:ln>
+                <a:noFill/>
+              </a:ln>
+              <a:solidFill>
+                <a:schemeClr val="tx1"/>
+              </a:solidFill>
+              <a:effectLst/>
+              <a:latin typeface="Verdana" panose="020B0604030504040204" pitchFamily="34" charset="0"/>
+              <a:ea typeface="Verdana" panose="020B0604030504040204" pitchFamily="34" charset="0"/>
+            </a:endParaRPr>
+          </a:p>
+          <a:p>
+            <a:pPr marL="0" marR="0" lvl="0" indent="0" algn="l" defTabSz="914400" rtl="0" eaLnBrk="0" fontAlgn="base" latinLnBrk="0" hangingPunct="0">
+              <a:lnSpc>
+                <a:spcPct val="100000"/>
+              </a:lnSpc>
+              <a:spcBef>
+                <a:spcPct val="0"/>
+              </a:spcBef>
+              <a:spcAft>
+                <a:spcPct val="0"/>
+              </a:spcAft>
+              <a:buClrTx/>
+              <a:buSzTx/>
+              <a:buNone/>
+              <a:tabLst/>
+            </a:pPr>
+            <a:r>
+              <a:rPr kumimoji="0" lang="en-US" altLang="en-US" sz="1800" b="0" i="0" u="none" strike="noStrike" cap="none" normalizeH="0" baseline="0" dirty="0">
+                <a:ln>
+                  <a:noFill/>
+                </a:ln>
+                <a:solidFill>
+                  <a:schemeClr val="tx1"/>
+                </a:solidFill>
+                <a:effectLst/>
+                <a:latin typeface="Verdana" panose="020B0604030504040204" pitchFamily="34" charset="0"/>
+                <a:ea typeface="Verdana" panose="020B0604030504040204" pitchFamily="34" charset="0"/>
+              </a:rPr>
+              <a:t>Standard University Server or Laptop (No GPU required).</a:t>
+            </a:r>
+          </a:p>
+          <a:p>
+            <a:pPr marL="0" marR="0" lvl="0" indent="0" algn="l" defTabSz="914400" rtl="0" eaLnBrk="0" fontAlgn="base" latinLnBrk="0" hangingPunct="0">
+              <a:lnSpc>
+                <a:spcPct val="100000"/>
+              </a:lnSpc>
+              <a:spcBef>
+                <a:spcPct val="0"/>
+              </a:spcBef>
+              <a:spcAft>
+                <a:spcPct val="0"/>
+              </a:spcAft>
+              <a:buClrTx/>
+              <a:buSzTx/>
+              <a:buNone/>
+              <a:tabLst/>
+            </a:pPr>
+            <a:r>
+              <a:rPr kumimoji="0" lang="en-US" altLang="en-US" sz="1800" b="0" i="0" u="none" strike="noStrike" cap="none" normalizeH="0" baseline="0" dirty="0">
+                <a:ln>
+                  <a:noFill/>
+                </a:ln>
+                <a:solidFill>
+                  <a:schemeClr val="tx1"/>
+                </a:solidFill>
+                <a:effectLst/>
+                <a:latin typeface="Verdana" panose="020B0604030504040204" pitchFamily="34" charset="0"/>
+                <a:ea typeface="Verdana" panose="020B0604030504040204" pitchFamily="34" charset="0"/>
+              </a:rPr>
+              <a:t>Docker environment for containerization.</a:t>
             </a:r>
           </a:p>
         </p:txBody>
@@ -7367,35 +9396,6 @@
           <a:chExt cx="0" cy="0"/>
         </a:xfrm>
       </p:grpSpPr>
-      <p:pic>
-        <p:nvPicPr>
-          <p:cNvPr id="4" name="Content Placeholder 3"/>
-          <p:cNvPicPr>
-            <a:picLocks noGrp="1" noChangeAspect="1"/>
-          </p:cNvPicPr>
-          <p:nvPr>
-            <p:ph idx="1"/>
-          </p:nvPr>
-        </p:nvPicPr>
-        <p:blipFill>
-          <a:blip r:embed="rId3" cstate="print">
-            <a:extLst>
-              <a:ext uri="{28A0092B-C50C-407E-A947-70E740481C1C}">
-                <a14:useLocalDpi xmlns:a14="http://schemas.microsoft.com/office/drawing/2010/main" val="0"/>
-              </a:ext>
-            </a:extLst>
-          </a:blip>
-          <a:stretch>
-            <a:fillRect/>
-          </a:stretch>
-        </p:blipFill>
-        <p:spPr>
-          <a:xfrm>
-            <a:off x="44047" y="0"/>
-            <a:ext cx="9180512" cy="6885384"/>
-          </a:xfrm>
-        </p:spPr>
-      </p:pic>
       <p:sp>
         <p:nvSpPr>
           <p:cNvPr id="5" name="Rectangle 1"/>
@@ -7521,7 +9521,7 @@
           <p:nvPr/>
         </p:nvPicPr>
         <p:blipFill>
-          <a:blip r:embed="rId4" cstate="print">
+          <a:blip r:embed="rId3" cstate="print">
             <a:extLst>
               <a:ext uri="{28A0092B-C50C-407E-A947-70E740481C1C}">
                 <a14:useLocalDpi xmlns:a14="http://schemas.microsoft.com/office/drawing/2010/main" val="0"/>
@@ -7547,7 +9547,7 @@
           <p:cNvPr id="6" name="TextBox 5">
             <a:extLst>
               <a:ext uri="{FF2B5EF4-FFF2-40B4-BE49-F238E27FC236}">
-                <a16:creationId xmlns="" xmlns:a16="http://schemas.microsoft.com/office/drawing/2014/main" id="{AE24D516-77C6-C96A-5F77-D099623448D8}"/>
+                <a16:creationId xmlns:a16="http://schemas.microsoft.com/office/drawing/2014/main" id="{AE24D516-77C6-C96A-5F77-D099623448D8}"/>
               </a:ext>
             </a:extLst>
           </p:cNvPr>
@@ -7604,99 +9604,552 @@
       </p:sp>
       <p:sp>
         <p:nvSpPr>
-          <p:cNvPr id="3" name="TextBox 2">
+          <p:cNvPr id="10" name="Rectangle 1">
             <a:extLst>
               <a:ext uri="{FF2B5EF4-FFF2-40B4-BE49-F238E27FC236}">
-                <a16:creationId xmlns="" xmlns:a16="http://schemas.microsoft.com/office/drawing/2014/main" id="{659AC123-1FF4-759B-44D8-95C077A7D7D5}"/>
+                <a16:creationId xmlns:a16="http://schemas.microsoft.com/office/drawing/2014/main" id="{372C8601-DE05-D6CC-B9AB-1E9D7F9DD2C1}"/>
               </a:ext>
             </a:extLst>
           </p:cNvPr>
-          <p:cNvSpPr txBox="1"/>
-          <p:nvPr/>
-        </p:nvSpPr>
-        <p:spPr>
+          <p:cNvSpPr>
+            <a:spLocks noGrp="1" noChangeArrowheads="1"/>
+          </p:cNvSpPr>
+          <p:nvPr>
+            <p:ph idx="1"/>
+          </p:nvPr>
+        </p:nvSpPr>
+        <p:spPr bwMode="auto">
           <a:xfrm>
-            <a:off x="213724" y="1306624"/>
-            <a:ext cx="8606747" cy="1200329"/>
+            <a:off x="462372" y="1330305"/>
+            <a:ext cx="8219256" cy="4801314"/>
           </a:xfrm>
           <a:prstGeom prst="rect">
             <a:avLst/>
           </a:prstGeom>
           <a:noFill/>
+          <a:ln>
+            <a:noFill/>
+          </a:ln>
+          <a:effectLst/>
+          <a:extLst>
+            <a:ext uri="{909E8E84-426E-40DD-AFC4-6F175D3DCCD1}">
+              <a14:hiddenFill xmlns:a14="http://schemas.microsoft.com/office/drawing/2010/main">
+                <a:solidFill>
+                  <a:schemeClr val="accent1"/>
+                </a:solidFill>
+              </a14:hiddenFill>
+            </a:ext>
+            <a:ext uri="{91240B29-F687-4F45-9708-019B960494DF}">
+              <a14:hiddenLine xmlns:a14="http://schemas.microsoft.com/office/drawing/2010/main" w="9525">
+                <a:solidFill>
+                  <a:schemeClr val="tx1"/>
+                </a:solidFill>
+                <a:miter lim="800000"/>
+                <a:headEnd/>
+                <a:tailEnd/>
+              </a14:hiddenLine>
+            </a:ext>
+            <a:ext uri="{AF507438-7753-43E0-B8FC-AC1667EBCBE1}">
+              <a14:hiddenEffects xmlns:a14="http://schemas.microsoft.com/office/drawing/2010/main">
+                <a:effectLst>
+                  <a:outerShdw dist="35921" dir="2700000" algn="ctr" rotWithShape="0">
+                    <a:schemeClr val="bg2"/>
+                  </a:outerShdw>
+                </a:effectLst>
+              </a14:hiddenEffects>
+            </a:ext>
+          </a:extLst>
         </p:spPr>
         <p:txBody>
-          <a:bodyPr wrap="square">
+          <a:bodyPr vert="horz" wrap="square" lIns="91440" tIns="45720" rIns="91440" bIns="45720" numCol="1" anchor="ctr" anchorCtr="0" compatLnSpc="1">
+            <a:prstTxWarp prst="textNoShape">
+              <a:avLst/>
+            </a:prstTxWarp>
             <a:spAutoFit/>
           </a:bodyPr>
           <a:lstStyle/>
           <a:p>
-            <a:pPr algn="l">
-              <a:buFont typeface="Arial" panose="020B0604020202020204" pitchFamily="34" charset="0"/>
-              <a:buChar char="•"/>
+            <a:pPr marL="0" marR="0" lvl="0" indent="0" algn="l" defTabSz="914400" rtl="0" eaLnBrk="0" fontAlgn="base" latinLnBrk="0" hangingPunct="0">
+              <a:lnSpc>
+                <a:spcPct val="100000"/>
+              </a:lnSpc>
+              <a:spcBef>
+                <a:spcPct val="0"/>
+              </a:spcBef>
+              <a:spcAft>
+                <a:spcPct val="0"/>
+              </a:spcAft>
+              <a:buClrTx/>
+              <a:buSzTx/>
+              <a:buNone/>
+              <a:tabLst/>
             </a:pPr>
             <a:r>
-              <a:rPr lang="en-US" b="0" i="0" dirty="0">
-                <a:solidFill>
-                  <a:srgbClr val="374151"/>
+              <a:rPr kumimoji="0" lang="en-US" altLang="en-US" sz="1800" b="1" i="0" u="none" strike="noStrike" cap="none" normalizeH="0" baseline="0" dirty="0">
+                <a:ln>
+                  <a:noFill/>
+                </a:ln>
+                <a:solidFill>
+                  <a:schemeClr val="tx1"/>
                 </a:solidFill>
                 <a:effectLst/>
-                <a:latin typeface="Söhne"/>
+                <a:latin typeface="Verdana" panose="020B0604030504040204" pitchFamily="34" charset="0"/>
+                <a:ea typeface="Verdana" panose="020B0604030504040204" pitchFamily="34" charset="0"/>
               </a:rPr>
-              <a:t>Explain the approach or methods you used to tackle the problem.</a:t>
-            </a:r>
-          </a:p>
-          <a:p>
-            <a:pPr algn="l">
-              <a:buFont typeface="Arial" panose="020B0604020202020204" pitchFamily="34" charset="0"/>
-              <a:buChar char="•"/>
+              <a:t>Approach:</a:t>
+            </a:r>
+          </a:p>
+          <a:p>
+            <a:pPr marL="0" marR="0" lvl="0" indent="0" algn="l" defTabSz="914400" rtl="0" eaLnBrk="0" fontAlgn="base" latinLnBrk="0" hangingPunct="0">
+              <a:lnSpc>
+                <a:spcPct val="100000"/>
+              </a:lnSpc>
+              <a:spcBef>
+                <a:spcPct val="0"/>
+              </a:spcBef>
+              <a:spcAft>
+                <a:spcPct val="0"/>
+              </a:spcAft>
+              <a:buClrTx/>
+              <a:buSzTx/>
+              <a:buNone/>
+              <a:tabLst/>
             </a:pPr>
-            <a:r>
-              <a:rPr lang="en-US" b="0" i="0" dirty="0">
-                <a:solidFill>
-                  <a:srgbClr val="374151"/>
-                </a:solidFill>
-                <a:effectLst/>
-                <a:latin typeface="Söhne"/>
-              </a:rPr>
-              <a:t>Include any tools or technologies utilized.</a:t>
-            </a:r>
-          </a:p>
-          <a:p>
-            <a:pPr>
-              <a:buFont typeface="Arial" panose="020B0604020202020204" pitchFamily="34" charset="0"/>
-              <a:buChar char="•"/>
-            </a:pPr>
-            <a:r>
-              <a:rPr lang="en-US" dirty="0">
-                <a:solidFill>
-                  <a:srgbClr val="374151"/>
-                </a:solidFill>
-                <a:latin typeface="Söhne"/>
-              </a:rPr>
-              <a:t>Tools, technologies, frameworks you will use</a:t>
-            </a:r>
-          </a:p>
-          <a:p>
-            <a:pPr>
-              <a:buFont typeface="Arial" panose="020B0604020202020204" pitchFamily="34" charset="0"/>
-              <a:buChar char="•"/>
-            </a:pPr>
-            <a:r>
-              <a:rPr lang="en-US" dirty="0">
-                <a:solidFill>
-                  <a:srgbClr val="374151"/>
-                </a:solidFill>
-                <a:latin typeface="Söhne"/>
-              </a:rPr>
-              <a:t>Block diagram or flowchart (if applicable)</a:t>
-            </a:r>
-            <a:endParaRPr lang="en-US" b="0" i="0" dirty="0">
+            <a:endParaRPr kumimoji="0" lang="en-US" altLang="en-US" sz="1800" b="0" i="0" u="none" strike="noStrike" cap="none" normalizeH="0" baseline="0" dirty="0">
+              <a:ln>
+                <a:noFill/>
+              </a:ln>
               <a:solidFill>
-                <a:srgbClr val="374151"/>
+                <a:schemeClr val="tx1"/>
               </a:solidFill>
               <a:effectLst/>
-              <a:latin typeface="Söhne"/>
+              <a:latin typeface="Verdana" panose="020B0604030504040204" pitchFamily="34" charset="0"/>
+              <a:ea typeface="Verdana" panose="020B0604030504040204" pitchFamily="34" charset="0"/>
             </a:endParaRPr>
+          </a:p>
+          <a:p>
+            <a:pPr marL="0" marR="0" lvl="0" indent="0" algn="l" defTabSz="914400" rtl="0" eaLnBrk="0" fontAlgn="base" latinLnBrk="0" hangingPunct="0">
+              <a:lnSpc>
+                <a:spcPct val="100000"/>
+              </a:lnSpc>
+              <a:spcBef>
+                <a:spcPct val="0"/>
+              </a:spcBef>
+              <a:spcAft>
+                <a:spcPct val="0"/>
+              </a:spcAft>
+              <a:buClrTx/>
+              <a:buSzTx/>
+              <a:buNone/>
+              <a:tabLst/>
+            </a:pPr>
+            <a:r>
+              <a:rPr kumimoji="0" lang="en-US" altLang="en-US" sz="1800" b="1" i="0" u="none" strike="noStrike" cap="none" normalizeH="0" baseline="0" dirty="0">
+                <a:ln>
+                  <a:noFill/>
+                </a:ln>
+                <a:solidFill>
+                  <a:schemeClr val="tx1"/>
+                </a:solidFill>
+                <a:effectLst/>
+                <a:latin typeface="Verdana" panose="020B0604030504040204" pitchFamily="34" charset="0"/>
+                <a:ea typeface="Verdana" panose="020B0604030504040204" pitchFamily="34" charset="0"/>
+              </a:rPr>
+              <a:t>Phase 1: Digitization:</a:t>
+            </a:r>
+            <a:r>
+              <a:rPr kumimoji="0" lang="en-US" altLang="en-US" sz="1800" b="0" i="0" u="none" strike="noStrike" cap="none" normalizeH="0" baseline="0" dirty="0">
+                <a:ln>
+                  <a:noFill/>
+                </a:ln>
+                <a:solidFill>
+                  <a:schemeClr val="tx1"/>
+                </a:solidFill>
+                <a:effectLst/>
+                <a:latin typeface="Verdana" panose="020B0604030504040204" pitchFamily="34" charset="0"/>
+                <a:ea typeface="Verdana" panose="020B0604030504040204" pitchFamily="34" charset="0"/>
+              </a:rPr>
+              <a:t> Converting Stops addresses into precise GPS coordinates.</a:t>
+            </a:r>
+          </a:p>
+          <a:p>
+            <a:pPr marL="0" marR="0" lvl="0" indent="0" algn="l" defTabSz="914400" rtl="0" eaLnBrk="0" fontAlgn="base" latinLnBrk="0" hangingPunct="0">
+              <a:lnSpc>
+                <a:spcPct val="100000"/>
+              </a:lnSpc>
+              <a:spcBef>
+                <a:spcPct val="0"/>
+              </a:spcBef>
+              <a:spcAft>
+                <a:spcPct val="0"/>
+              </a:spcAft>
+              <a:buClrTx/>
+              <a:buSzTx/>
+              <a:buNone/>
+              <a:tabLst/>
+            </a:pPr>
+            <a:endParaRPr kumimoji="0" lang="en-US" altLang="en-US" sz="1800" b="0" i="0" u="none" strike="noStrike" cap="none" normalizeH="0" baseline="0" dirty="0">
+              <a:ln>
+                <a:noFill/>
+              </a:ln>
+              <a:solidFill>
+                <a:schemeClr val="tx1"/>
+              </a:solidFill>
+              <a:effectLst/>
+              <a:latin typeface="Verdana" panose="020B0604030504040204" pitchFamily="34" charset="0"/>
+              <a:ea typeface="Verdana" panose="020B0604030504040204" pitchFamily="34" charset="0"/>
+            </a:endParaRPr>
+          </a:p>
+          <a:p>
+            <a:pPr marL="0" marR="0" lvl="0" indent="0" algn="l" defTabSz="914400" rtl="0" eaLnBrk="0" fontAlgn="base" latinLnBrk="0" hangingPunct="0">
+              <a:lnSpc>
+                <a:spcPct val="100000"/>
+              </a:lnSpc>
+              <a:spcBef>
+                <a:spcPct val="0"/>
+              </a:spcBef>
+              <a:spcAft>
+                <a:spcPct val="0"/>
+              </a:spcAft>
+              <a:buClrTx/>
+              <a:buSzTx/>
+              <a:buNone/>
+              <a:tabLst/>
+            </a:pPr>
+            <a:r>
+              <a:rPr kumimoji="0" lang="en-US" altLang="en-US" sz="1800" b="1" i="0" u="none" strike="noStrike" cap="none" normalizeH="0" baseline="0" dirty="0">
+                <a:ln>
+                  <a:noFill/>
+                </a:ln>
+                <a:solidFill>
+                  <a:schemeClr val="tx1"/>
+                </a:solidFill>
+                <a:effectLst/>
+                <a:latin typeface="Verdana" panose="020B0604030504040204" pitchFamily="34" charset="0"/>
+                <a:ea typeface="Verdana" panose="020B0604030504040204" pitchFamily="34" charset="0"/>
+              </a:rPr>
+              <a:t>Phase 2: Matrix Generation:</a:t>
+            </a:r>
+            <a:r>
+              <a:rPr kumimoji="0" lang="en-US" altLang="en-US" sz="1800" b="0" i="0" u="none" strike="noStrike" cap="none" normalizeH="0" baseline="0" dirty="0">
+                <a:ln>
+                  <a:noFill/>
+                </a:ln>
+                <a:solidFill>
+                  <a:schemeClr val="tx1"/>
+                </a:solidFill>
+                <a:effectLst/>
+                <a:latin typeface="Verdana" panose="020B0604030504040204" pitchFamily="34" charset="0"/>
+                <a:ea typeface="Verdana" panose="020B0604030504040204" pitchFamily="34" charset="0"/>
+              </a:rPr>
+              <a:t> Using self-hosted OSRM to calculate a "Cost Matrix" (Time/Distance) for all stops.</a:t>
+            </a:r>
+          </a:p>
+          <a:p>
+            <a:pPr marL="0" marR="0" lvl="0" indent="0" algn="l" defTabSz="914400" rtl="0" eaLnBrk="0" fontAlgn="base" latinLnBrk="0" hangingPunct="0">
+              <a:lnSpc>
+                <a:spcPct val="100000"/>
+              </a:lnSpc>
+              <a:spcBef>
+                <a:spcPct val="0"/>
+              </a:spcBef>
+              <a:spcAft>
+                <a:spcPct val="0"/>
+              </a:spcAft>
+              <a:buClrTx/>
+              <a:buSzTx/>
+              <a:buNone/>
+              <a:tabLst/>
+            </a:pPr>
+            <a:endParaRPr kumimoji="0" lang="en-US" altLang="en-US" sz="1800" b="0" i="0" u="none" strike="noStrike" cap="none" normalizeH="0" baseline="0" dirty="0">
+              <a:ln>
+                <a:noFill/>
+              </a:ln>
+              <a:solidFill>
+                <a:schemeClr val="tx1"/>
+              </a:solidFill>
+              <a:effectLst/>
+              <a:latin typeface="Verdana" panose="020B0604030504040204" pitchFamily="34" charset="0"/>
+              <a:ea typeface="Verdana" panose="020B0604030504040204" pitchFamily="34" charset="0"/>
+            </a:endParaRPr>
+          </a:p>
+          <a:p>
+            <a:pPr marL="0" marR="0" lvl="0" indent="0" algn="l" defTabSz="914400" rtl="0" eaLnBrk="0" fontAlgn="base" latinLnBrk="0" hangingPunct="0">
+              <a:lnSpc>
+                <a:spcPct val="100000"/>
+              </a:lnSpc>
+              <a:spcBef>
+                <a:spcPct val="0"/>
+              </a:spcBef>
+              <a:spcAft>
+                <a:spcPct val="0"/>
+              </a:spcAft>
+              <a:buClrTx/>
+              <a:buSzTx/>
+              <a:buNone/>
+              <a:tabLst/>
+            </a:pPr>
+            <a:r>
+              <a:rPr kumimoji="0" lang="en-US" altLang="en-US" sz="1800" b="1" i="0" u="none" strike="noStrike" cap="none" normalizeH="0" baseline="0" dirty="0">
+                <a:ln>
+                  <a:noFill/>
+                </a:ln>
+                <a:solidFill>
+                  <a:schemeClr val="tx1"/>
+                </a:solidFill>
+                <a:effectLst/>
+                <a:latin typeface="Verdana" panose="020B0604030504040204" pitchFamily="34" charset="0"/>
+                <a:ea typeface="Verdana" panose="020B0604030504040204" pitchFamily="34" charset="0"/>
+              </a:rPr>
+              <a:t>Phase 3: Optimization:</a:t>
+            </a:r>
+            <a:r>
+              <a:rPr kumimoji="0" lang="en-US" altLang="en-US" sz="1800" b="0" i="0" u="none" strike="noStrike" cap="none" normalizeH="0" baseline="0" dirty="0">
+                <a:ln>
+                  <a:noFill/>
+                </a:ln>
+                <a:solidFill>
+                  <a:schemeClr val="tx1"/>
+                </a:solidFill>
+                <a:effectLst/>
+                <a:latin typeface="Verdana" panose="020B0604030504040204" pitchFamily="34" charset="0"/>
+                <a:ea typeface="Verdana" panose="020B0604030504040204" pitchFamily="34" charset="0"/>
+              </a:rPr>
+              <a:t> Applying the "Guided Local Search" algorithm to cluster stops into efficient bus routes.</a:t>
+            </a:r>
+          </a:p>
+          <a:p>
+            <a:pPr marL="0" marR="0" lvl="0" indent="0" algn="l" defTabSz="914400" rtl="0" eaLnBrk="0" fontAlgn="base" latinLnBrk="0" hangingPunct="0">
+              <a:lnSpc>
+                <a:spcPct val="100000"/>
+              </a:lnSpc>
+              <a:spcBef>
+                <a:spcPct val="0"/>
+              </a:spcBef>
+              <a:spcAft>
+                <a:spcPct val="0"/>
+              </a:spcAft>
+              <a:buClrTx/>
+              <a:buSzTx/>
+              <a:buNone/>
+              <a:tabLst/>
+            </a:pPr>
+            <a:endParaRPr kumimoji="0" lang="en-US" altLang="en-US" sz="1800" b="0" i="0" u="none" strike="noStrike" cap="none" normalizeH="0" baseline="0" dirty="0">
+              <a:ln>
+                <a:noFill/>
+              </a:ln>
+              <a:solidFill>
+                <a:schemeClr val="tx1"/>
+              </a:solidFill>
+              <a:effectLst/>
+              <a:latin typeface="Verdana" panose="020B0604030504040204" pitchFamily="34" charset="0"/>
+              <a:ea typeface="Verdana" panose="020B0604030504040204" pitchFamily="34" charset="0"/>
+            </a:endParaRPr>
+          </a:p>
+          <a:p>
+            <a:pPr marL="0" marR="0" lvl="0" indent="0" algn="l" defTabSz="914400" rtl="0" eaLnBrk="0" fontAlgn="base" latinLnBrk="0" hangingPunct="0">
+              <a:lnSpc>
+                <a:spcPct val="100000"/>
+              </a:lnSpc>
+              <a:spcBef>
+                <a:spcPct val="0"/>
+              </a:spcBef>
+              <a:spcAft>
+                <a:spcPct val="0"/>
+              </a:spcAft>
+              <a:buClrTx/>
+              <a:buSzTx/>
+              <a:buNone/>
+              <a:tabLst/>
+            </a:pPr>
+            <a:r>
+              <a:rPr kumimoji="0" lang="en-US" altLang="en-US" sz="1800" b="1" i="0" u="none" strike="noStrike" cap="none" normalizeH="0" baseline="0" dirty="0">
+                <a:ln>
+                  <a:noFill/>
+                </a:ln>
+                <a:solidFill>
+                  <a:schemeClr val="tx1"/>
+                </a:solidFill>
+                <a:effectLst/>
+                <a:latin typeface="Verdana" panose="020B0604030504040204" pitchFamily="34" charset="0"/>
+                <a:ea typeface="Verdana" panose="020B0604030504040204" pitchFamily="34" charset="0"/>
+              </a:rPr>
+              <a:t>Phase 4: Visualization:</a:t>
+            </a:r>
+            <a:r>
+              <a:rPr kumimoji="0" lang="en-US" altLang="en-US" sz="1800" b="0" i="0" u="none" strike="noStrike" cap="none" normalizeH="0" baseline="0" dirty="0">
+                <a:ln>
+                  <a:noFill/>
+                </a:ln>
+                <a:solidFill>
+                  <a:schemeClr val="tx1"/>
+                </a:solidFill>
+                <a:effectLst/>
+                <a:latin typeface="Verdana" panose="020B0604030504040204" pitchFamily="34" charset="0"/>
+                <a:ea typeface="Verdana" panose="020B0604030504040204" pitchFamily="34" charset="0"/>
+              </a:rPr>
+              <a:t> Rendering the final paths on the admin dashboard.</a:t>
+            </a:r>
+          </a:p>
+          <a:p>
+            <a:pPr marL="0" marR="0" lvl="0" indent="0" algn="l" defTabSz="914400" rtl="0" eaLnBrk="0" fontAlgn="base" latinLnBrk="0" hangingPunct="0">
+              <a:lnSpc>
+                <a:spcPct val="100000"/>
+              </a:lnSpc>
+              <a:spcBef>
+                <a:spcPct val="0"/>
+              </a:spcBef>
+              <a:spcAft>
+                <a:spcPct val="0"/>
+              </a:spcAft>
+              <a:buClrTx/>
+              <a:buSzTx/>
+              <a:buNone/>
+              <a:tabLst/>
+            </a:pPr>
+            <a:endParaRPr kumimoji="0" lang="en-US" altLang="en-US" sz="1800" b="0" i="0" u="none" strike="noStrike" cap="none" normalizeH="0" baseline="0" dirty="0">
+              <a:ln>
+                <a:noFill/>
+              </a:ln>
+              <a:solidFill>
+                <a:schemeClr val="tx1"/>
+              </a:solidFill>
+              <a:effectLst/>
+              <a:latin typeface="Verdana" panose="020B0604030504040204" pitchFamily="34" charset="0"/>
+              <a:ea typeface="Verdana" panose="020B0604030504040204" pitchFamily="34" charset="0"/>
+            </a:endParaRPr>
+          </a:p>
+          <a:p>
+            <a:pPr marL="0" marR="0" lvl="0" indent="0" algn="l" defTabSz="914400" rtl="0" eaLnBrk="0" fontAlgn="base" latinLnBrk="0" hangingPunct="0">
+              <a:lnSpc>
+                <a:spcPct val="100000"/>
+              </a:lnSpc>
+              <a:spcBef>
+                <a:spcPct val="0"/>
+              </a:spcBef>
+              <a:spcAft>
+                <a:spcPct val="0"/>
+              </a:spcAft>
+              <a:buClrTx/>
+              <a:buSzTx/>
+              <a:buNone/>
+              <a:tabLst/>
+            </a:pPr>
+            <a:r>
+              <a:rPr kumimoji="0" lang="en-US" altLang="en-US" sz="1800" b="1" i="0" u="none" strike="noStrike" cap="none" normalizeH="0" baseline="0" dirty="0">
+                <a:ln>
+                  <a:noFill/>
+                </a:ln>
+                <a:solidFill>
+                  <a:schemeClr val="tx1"/>
+                </a:solidFill>
+                <a:effectLst/>
+                <a:latin typeface="Verdana" panose="020B0604030504040204" pitchFamily="34" charset="0"/>
+                <a:ea typeface="Verdana" panose="020B0604030504040204" pitchFamily="34" charset="0"/>
+              </a:rPr>
+              <a:t>Technologies Used:</a:t>
+            </a:r>
+            <a:endParaRPr kumimoji="0" lang="en-US" altLang="en-US" sz="1800" b="0" i="0" u="none" strike="noStrike" cap="none" normalizeH="0" baseline="0" dirty="0">
+              <a:ln>
+                <a:noFill/>
+              </a:ln>
+              <a:solidFill>
+                <a:schemeClr val="tx1"/>
+              </a:solidFill>
+              <a:effectLst/>
+              <a:latin typeface="Verdana" panose="020B0604030504040204" pitchFamily="34" charset="0"/>
+              <a:ea typeface="Verdana" panose="020B0604030504040204" pitchFamily="34" charset="0"/>
+            </a:endParaRPr>
+          </a:p>
+          <a:p>
+            <a:pPr marL="0" marR="0" lvl="0" indent="0" algn="l" defTabSz="914400" rtl="0" eaLnBrk="0" fontAlgn="base" latinLnBrk="0" hangingPunct="0">
+              <a:lnSpc>
+                <a:spcPct val="100000"/>
+              </a:lnSpc>
+              <a:spcBef>
+                <a:spcPct val="0"/>
+              </a:spcBef>
+              <a:spcAft>
+                <a:spcPct val="0"/>
+              </a:spcAft>
+              <a:buClrTx/>
+              <a:buSzTx/>
+              <a:buNone/>
+              <a:tabLst/>
+            </a:pPr>
+            <a:r>
+              <a:rPr kumimoji="0" lang="en-US" altLang="en-US" sz="1800" b="1" i="0" u="none" strike="noStrike" cap="none" normalizeH="0" baseline="0" dirty="0">
+                <a:ln>
+                  <a:noFill/>
+                </a:ln>
+                <a:solidFill>
+                  <a:schemeClr val="tx1"/>
+                </a:solidFill>
+                <a:effectLst/>
+                <a:latin typeface="Verdana" panose="020B0604030504040204" pitchFamily="34" charset="0"/>
+                <a:ea typeface="Verdana" panose="020B0604030504040204" pitchFamily="34" charset="0"/>
+              </a:rPr>
+              <a:t>Docker:</a:t>
+            </a:r>
+            <a:r>
+              <a:rPr kumimoji="0" lang="en-US" altLang="en-US" sz="1800" b="0" i="0" u="none" strike="noStrike" cap="none" normalizeH="0" baseline="0" dirty="0">
+                <a:ln>
+                  <a:noFill/>
+                </a:ln>
+                <a:solidFill>
+                  <a:schemeClr val="tx1"/>
+                </a:solidFill>
+                <a:effectLst/>
+                <a:latin typeface="Verdana" panose="020B0604030504040204" pitchFamily="34" charset="0"/>
+                <a:ea typeface="Verdana" panose="020B0604030504040204" pitchFamily="34" charset="0"/>
+              </a:rPr>
+              <a:t> For hosting the routing engine.</a:t>
+            </a:r>
+          </a:p>
+          <a:p>
+            <a:pPr marL="0" marR="0" lvl="0" indent="0" algn="l" defTabSz="914400" rtl="0" eaLnBrk="0" fontAlgn="base" latinLnBrk="0" hangingPunct="0">
+              <a:lnSpc>
+                <a:spcPct val="100000"/>
+              </a:lnSpc>
+              <a:spcBef>
+                <a:spcPct val="0"/>
+              </a:spcBef>
+              <a:spcAft>
+                <a:spcPct val="0"/>
+              </a:spcAft>
+              <a:buClrTx/>
+              <a:buSzTx/>
+              <a:buNone/>
+              <a:tabLst/>
+            </a:pPr>
+            <a:r>
+              <a:rPr kumimoji="0" lang="en-US" altLang="en-US" sz="1800" b="1" i="0" u="none" strike="noStrike" cap="none" normalizeH="0" baseline="0" dirty="0">
+                <a:ln>
+                  <a:noFill/>
+                </a:ln>
+                <a:solidFill>
+                  <a:schemeClr val="tx1"/>
+                </a:solidFill>
+                <a:effectLst/>
+                <a:latin typeface="Verdana" panose="020B0604030504040204" pitchFamily="34" charset="0"/>
+                <a:ea typeface="Verdana" panose="020B0604030504040204" pitchFamily="34" charset="0"/>
+              </a:rPr>
+              <a:t>PostgreSQL:</a:t>
+            </a:r>
+            <a:r>
+              <a:rPr kumimoji="0" lang="en-US" altLang="en-US" sz="1800" b="0" i="0" u="none" strike="noStrike" cap="none" normalizeH="0" baseline="0" dirty="0">
+                <a:ln>
+                  <a:noFill/>
+                </a:ln>
+                <a:solidFill>
+                  <a:schemeClr val="tx1"/>
+                </a:solidFill>
+                <a:effectLst/>
+                <a:latin typeface="Verdana" panose="020B0604030504040204" pitchFamily="34" charset="0"/>
+                <a:ea typeface="Verdana" panose="020B0604030504040204" pitchFamily="34" charset="0"/>
+              </a:rPr>
+              <a:t> For structured data storage.</a:t>
+            </a:r>
           </a:p>
         </p:txBody>
       </p:sp>
